--- a/icons/20250707-BackgroundNekton.pptx
+++ b/icons/20250707-BackgroundNekton.pptx
@@ -5,14 +5,16 @@
     <p:sldMasterId id="2147483648" r:id="rId1"/>
   </p:sldMasterIdLst>
   <p:handoutMasterIdLst>
-    <p:handoutMasterId r:id="rId7"/>
+    <p:handoutMasterId r:id="rId9"/>
   </p:handoutMasterIdLst>
   <p:sldIdLst>
     <p:sldId id="263" r:id="rId2"/>
-    <p:sldId id="256" r:id="rId3"/>
-    <p:sldId id="264" r:id="rId4"/>
-    <p:sldId id="261" r:id="rId5"/>
-    <p:sldId id="262" r:id="rId6"/>
+    <p:sldId id="265" r:id="rId3"/>
+    <p:sldId id="266" r:id="rId4"/>
+    <p:sldId id="256" r:id="rId5"/>
+    <p:sldId id="264" r:id="rId6"/>
+    <p:sldId id="261" r:id="rId7"/>
+    <p:sldId id="262" r:id="rId8"/>
   </p:sldIdLst>
   <p:sldSz cx="9144000" cy="6858000" type="screen4x3"/>
   <p:notesSz cx="6794500" cy="9906000"/>
@@ -212,7 +214,7 @@
           <a:p>
             <a:fld id="{D7428B70-92E3-48E1-BE49-F8A05A0EC16C}" type="datetimeFigureOut">
               <a:rPr lang="fr-FR" smtClean="0"/>
-              <a:t>11/05/2026</a:t>
+              <a:t>31/07/2026</a:t>
             </a:fld>
             <a:endParaRPr lang="fr-FR"/>
           </a:p>
@@ -474,7 +476,7 @@
           <a:p>
             <a:fld id="{D7E1F5DE-F893-487E-8A46-2A5279405891}" type="datetimeFigureOut">
               <a:rPr lang="fr-FR" smtClean="0"/>
-              <a:t>11/05/2026</a:t>
+              <a:t>31/07/2026</a:t>
             </a:fld>
             <a:endParaRPr lang="fr-FR"/>
           </a:p>
@@ -642,7 +644,7 @@
           <a:p>
             <a:fld id="{D7E1F5DE-F893-487E-8A46-2A5279405891}" type="datetimeFigureOut">
               <a:rPr lang="fr-FR" smtClean="0"/>
-              <a:t>11/05/2026</a:t>
+              <a:t>31/07/2026</a:t>
             </a:fld>
             <a:endParaRPr lang="fr-FR"/>
           </a:p>
@@ -820,7 +822,7 @@
           <a:p>
             <a:fld id="{D7E1F5DE-F893-487E-8A46-2A5279405891}" type="datetimeFigureOut">
               <a:rPr lang="fr-FR" smtClean="0"/>
-              <a:t>11/05/2026</a:t>
+              <a:t>31/07/2026</a:t>
             </a:fld>
             <a:endParaRPr lang="fr-FR"/>
           </a:p>
@@ -988,7 +990,7 @@
           <a:p>
             <a:fld id="{D7E1F5DE-F893-487E-8A46-2A5279405891}" type="datetimeFigureOut">
               <a:rPr lang="fr-FR" smtClean="0"/>
-              <a:t>11/05/2026</a:t>
+              <a:t>31/07/2026</a:t>
             </a:fld>
             <a:endParaRPr lang="fr-FR"/>
           </a:p>
@@ -1233,7 +1235,7 @@
           <a:p>
             <a:fld id="{D7E1F5DE-F893-487E-8A46-2A5279405891}" type="datetimeFigureOut">
               <a:rPr lang="fr-FR" smtClean="0"/>
-              <a:t>11/05/2026</a:t>
+              <a:t>31/07/2026</a:t>
             </a:fld>
             <a:endParaRPr lang="fr-FR"/>
           </a:p>
@@ -1518,7 +1520,7 @@
           <a:p>
             <a:fld id="{D7E1F5DE-F893-487E-8A46-2A5279405891}" type="datetimeFigureOut">
               <a:rPr lang="fr-FR" smtClean="0"/>
-              <a:t>11/05/2026</a:t>
+              <a:t>31/07/2026</a:t>
             </a:fld>
             <a:endParaRPr lang="fr-FR"/>
           </a:p>
@@ -1937,7 +1939,7 @@
           <a:p>
             <a:fld id="{D7E1F5DE-F893-487E-8A46-2A5279405891}" type="datetimeFigureOut">
               <a:rPr lang="fr-FR" smtClean="0"/>
-              <a:t>11/05/2026</a:t>
+              <a:t>31/07/2026</a:t>
             </a:fld>
             <a:endParaRPr lang="fr-FR"/>
           </a:p>
@@ -2054,7 +2056,7 @@
           <a:p>
             <a:fld id="{D7E1F5DE-F893-487E-8A46-2A5279405891}" type="datetimeFigureOut">
               <a:rPr lang="fr-FR" smtClean="0"/>
-              <a:t>11/05/2026</a:t>
+              <a:t>31/07/2026</a:t>
             </a:fld>
             <a:endParaRPr lang="fr-FR"/>
           </a:p>
@@ -2149,7 +2151,7 @@
           <a:p>
             <a:fld id="{D7E1F5DE-F893-487E-8A46-2A5279405891}" type="datetimeFigureOut">
               <a:rPr lang="fr-FR" smtClean="0"/>
-              <a:t>11/05/2026</a:t>
+              <a:t>31/07/2026</a:t>
             </a:fld>
             <a:endParaRPr lang="fr-FR"/>
           </a:p>
@@ -2424,7 +2426,7 @@
           <a:p>
             <a:fld id="{D7E1F5DE-F893-487E-8A46-2A5279405891}" type="datetimeFigureOut">
               <a:rPr lang="fr-FR" smtClean="0"/>
-              <a:t>11/05/2026</a:t>
+              <a:t>31/07/2026</a:t>
             </a:fld>
             <a:endParaRPr lang="fr-FR"/>
           </a:p>
@@ -2676,7 +2678,7 @@
           <a:p>
             <a:fld id="{D7E1F5DE-F893-487E-8A46-2A5279405891}" type="datetimeFigureOut">
               <a:rPr lang="fr-FR" smtClean="0"/>
-              <a:t>11/05/2026</a:t>
+              <a:t>31/07/2026</a:t>
             </a:fld>
             <a:endParaRPr lang="fr-FR"/>
           </a:p>
@@ -2887,7 +2889,7 @@
           <a:p>
             <a:fld id="{D7E1F5DE-F893-487E-8A46-2A5279405891}" type="datetimeFigureOut">
               <a:rPr lang="fr-FR" smtClean="0"/>
-              <a:t>11/05/2026</a:t>
+              <a:t>31/07/2026</a:t>
             </a:fld>
             <a:endParaRPr lang="fr-FR"/>
           </a:p>
@@ -3294,10 +3296,10 @@
       </p:grpSpPr>
       <p:sp>
         <p:nvSpPr>
-          <p:cNvPr id="4" name="Rectangle 3">
+          <p:cNvPr id="72" name="Rectangle 71">
             <a:extLst>
               <a:ext uri="{FF2B5EF4-FFF2-40B4-BE49-F238E27FC236}">
-                <a16:creationId xmlns:a16="http://schemas.microsoft.com/office/drawing/2014/main" id="{97A08B69-3B1C-4AA6-935F-B8DA4B2E66E8}"/>
+                <a16:creationId xmlns:a16="http://schemas.microsoft.com/office/drawing/2014/main" id="{EBC35EC4-B393-43D6-AD32-C293DD5DB6E7}"/>
               </a:ext>
             </a:extLst>
           </p:cNvPr>
@@ -3305,27 +3307,19 @@
           <p:nvPr/>
         </p:nvSpPr>
         <p:spPr>
-          <a:xfrm rot="16200000">
-            <a:off x="4169643" y="801337"/>
-            <a:ext cx="396000" cy="5100986"/>
-          </a:xfrm>
-          <a:prstGeom prst="rect">
-            <a:avLst/>
-          </a:prstGeom>
-          <a:gradFill>
-            <a:gsLst>
-              <a:gs pos="0">
-                <a:srgbClr val="0070C0"/>
-              </a:gs>
-              <a:gs pos="50000">
-                <a:srgbClr val="FFFF00"/>
-              </a:gs>
-              <a:gs pos="100000">
-                <a:srgbClr val="FF0000"/>
-              </a:gs>
-            </a:gsLst>
-            <a:lin ang="5400000" scaled="1"/>
-          </a:gradFill>
+          <a:xfrm>
+            <a:off x="295807" y="3050952"/>
+            <a:ext cx="6292417" cy="978655"/>
+          </a:xfrm>
+          <a:prstGeom prst="rect">
+            <a:avLst/>
+          </a:prstGeom>
+          <a:solidFill>
+            <a:srgbClr val="CCCCCC"/>
+          </a:solidFill>
+          <a:ln>
+            <a:noFill/>
+          </a:ln>
         </p:spPr>
         <p:style>
           <a:lnRef idx="2">
@@ -3344,36 +3338,965 @@
           </a:fontRef>
         </p:style>
         <p:txBody>
-          <a:bodyPr rot="0" spcFirstLastPara="0" vertOverflow="overflow" horzOverflow="overflow" vert="horz" wrap="square" lIns="68580" tIns="34290" rIns="68580" bIns="34290" numCol="1" spcCol="0" rtlCol="0" fromWordArt="0" anchor="ctr" anchorCtr="0" forceAA="0" compatLnSpc="1">
-            <a:prstTxWarp prst="textNoShape">
+          <a:bodyPr rtlCol="0" anchor="ctr"/>
+          <a:lstStyle/>
+          <a:p>
+            <a:pPr algn="ctr"/>
+            <a:endParaRPr lang="fr-FR"/>
+          </a:p>
+        </p:txBody>
+      </p:sp>
+      <p:grpSp>
+        <p:nvGrpSpPr>
+          <p:cNvPr id="70" name="Groupe 69">
+            <a:extLst>
+              <a:ext uri="{FF2B5EF4-FFF2-40B4-BE49-F238E27FC236}">
+                <a16:creationId xmlns:a16="http://schemas.microsoft.com/office/drawing/2014/main" id="{7C994DD6-E4DA-4A3B-86CF-90DD1932C259}"/>
+              </a:ext>
+            </a:extLst>
+          </p:cNvPr>
+          <p:cNvGrpSpPr/>
+          <p:nvPr/>
+        </p:nvGrpSpPr>
+        <p:grpSpPr>
+          <a:xfrm>
+            <a:off x="1597175" y="3573016"/>
+            <a:ext cx="4631009" cy="389162"/>
+            <a:chOff x="1597175" y="3615902"/>
+            <a:chExt cx="4631009" cy="389162"/>
+          </a:xfrm>
+        </p:grpSpPr>
+        <p:sp>
+          <p:nvSpPr>
+            <p:cNvPr id="45" name="ZoneTexte 44">
+              <a:extLst>
+                <a:ext uri="{FF2B5EF4-FFF2-40B4-BE49-F238E27FC236}">
+                  <a16:creationId xmlns:a16="http://schemas.microsoft.com/office/drawing/2014/main" id="{2F9F0777-7B08-40E3-96F9-14951B77FB63}"/>
+                </a:ext>
+              </a:extLst>
+            </p:cNvPr>
+            <p:cNvSpPr txBox="1"/>
+            <p:nvPr/>
+          </p:nvSpPr>
+          <p:spPr>
+            <a:xfrm>
+              <a:off x="2017444" y="3681899"/>
+              <a:ext cx="428322" cy="323165"/>
+            </a:xfrm>
+            <a:prstGeom prst="rect">
               <a:avLst/>
-            </a:prstTxWarp>
-            <a:noAutofit/>
-          </a:bodyPr>
-          <a:lstStyle/>
-          <a:p>
-            <a:pPr algn="ctr" defTabSz="685800">
-              <a:spcAft>
-                <a:spcPts val="450"/>
-              </a:spcAft>
-            </a:pPr>
-            <a:br>
-              <a:rPr lang="fr-FR" sz="1350" dirty="0">
-                <a:solidFill>
-                  <a:prstClr val="white"/>
-                </a:solidFill>
-                <a:latin typeface="Calibri" panose="020F0502020204030204"/>
-              </a:rPr>
-            </a:br>
-            <a:endParaRPr lang="fr-FR" sz="1350" dirty="0">
-              <a:solidFill>
-                <a:prstClr val="white"/>
-              </a:solidFill>
-              <a:latin typeface="Calibri" panose="020F0502020204030204"/>
-            </a:endParaRPr>
-          </a:p>
-        </p:txBody>
-      </p:sp>
+            </a:prstGeom>
+            <a:noFill/>
+          </p:spPr>
+          <p:txBody>
+            <a:bodyPr wrap="none" rtlCol="0">
+              <a:spAutoFit/>
+            </a:bodyPr>
+            <a:lstStyle/>
+            <a:p>
+              <a:r>
+                <a:rPr lang="fr-FR" sz="1500" dirty="0">
+                  <a:solidFill>
+                    <a:srgbClr val="4A7EBB"/>
+                  </a:solidFill>
+                </a:rPr>
+                <a:t>,08</a:t>
+              </a:r>
+            </a:p>
+          </p:txBody>
+        </p:sp>
+        <p:sp>
+          <p:nvSpPr>
+            <p:cNvPr id="46" name="ZoneTexte 45">
+              <a:extLst>
+                <a:ext uri="{FF2B5EF4-FFF2-40B4-BE49-F238E27FC236}">
+                  <a16:creationId xmlns:a16="http://schemas.microsoft.com/office/drawing/2014/main" id="{183026A1-7993-43CC-AC62-AFE9B0A21048}"/>
+                </a:ext>
+              </a:extLst>
+            </p:cNvPr>
+            <p:cNvSpPr txBox="1"/>
+            <p:nvPr/>
+          </p:nvSpPr>
+          <p:spPr>
+            <a:xfrm>
+              <a:off x="2437713" y="3681899"/>
+              <a:ext cx="428322" cy="323165"/>
+            </a:xfrm>
+            <a:prstGeom prst="rect">
+              <a:avLst/>
+            </a:prstGeom>
+            <a:noFill/>
+          </p:spPr>
+          <p:txBody>
+            <a:bodyPr wrap="none" rtlCol="0">
+              <a:spAutoFit/>
+            </a:bodyPr>
+            <a:lstStyle/>
+            <a:p>
+              <a:r>
+                <a:rPr lang="fr-FR" sz="1500" dirty="0">
+                  <a:solidFill>
+                    <a:srgbClr val="4A7EBB"/>
+                  </a:solidFill>
+                </a:rPr>
+                <a:t>,11</a:t>
+              </a:r>
+            </a:p>
+          </p:txBody>
+        </p:sp>
+        <p:sp>
+          <p:nvSpPr>
+            <p:cNvPr id="47" name="ZoneTexte 46">
+              <a:extLst>
+                <a:ext uri="{FF2B5EF4-FFF2-40B4-BE49-F238E27FC236}">
+                  <a16:creationId xmlns:a16="http://schemas.microsoft.com/office/drawing/2014/main" id="{FE353274-54AA-47E6-94BE-BBDED9241F16}"/>
+                </a:ext>
+              </a:extLst>
+            </p:cNvPr>
+            <p:cNvSpPr txBox="1"/>
+            <p:nvPr/>
+          </p:nvSpPr>
+          <p:spPr>
+            <a:xfrm>
+              <a:off x="2857982" y="3681899"/>
+              <a:ext cx="428322" cy="323165"/>
+            </a:xfrm>
+            <a:prstGeom prst="rect">
+              <a:avLst/>
+            </a:prstGeom>
+            <a:noFill/>
+          </p:spPr>
+          <p:txBody>
+            <a:bodyPr wrap="none" rtlCol="0">
+              <a:spAutoFit/>
+            </a:bodyPr>
+            <a:lstStyle/>
+            <a:p>
+              <a:r>
+                <a:rPr lang="fr-FR" sz="1500" dirty="0">
+                  <a:solidFill>
+                    <a:srgbClr val="4A7EBB"/>
+                  </a:solidFill>
+                </a:rPr>
+                <a:t>,18</a:t>
+              </a:r>
+            </a:p>
+          </p:txBody>
+        </p:sp>
+        <p:sp>
+          <p:nvSpPr>
+            <p:cNvPr id="48" name="ZoneTexte 47">
+              <a:extLst>
+                <a:ext uri="{FF2B5EF4-FFF2-40B4-BE49-F238E27FC236}">
+                  <a16:creationId xmlns:a16="http://schemas.microsoft.com/office/drawing/2014/main" id="{65A65B68-DF53-4808-A726-C080F1351753}"/>
+                </a:ext>
+              </a:extLst>
+            </p:cNvPr>
+            <p:cNvSpPr txBox="1"/>
+            <p:nvPr/>
+          </p:nvSpPr>
+          <p:spPr>
+            <a:xfrm>
+              <a:off x="3278251" y="3681899"/>
+              <a:ext cx="428322" cy="323165"/>
+            </a:xfrm>
+            <a:prstGeom prst="rect">
+              <a:avLst/>
+            </a:prstGeom>
+            <a:noFill/>
+          </p:spPr>
+          <p:txBody>
+            <a:bodyPr wrap="none" rtlCol="0">
+              <a:spAutoFit/>
+            </a:bodyPr>
+            <a:lstStyle/>
+            <a:p>
+              <a:r>
+                <a:rPr lang="fr-FR" sz="1500" dirty="0">
+                  <a:solidFill>
+                    <a:srgbClr val="4A7EBB"/>
+                  </a:solidFill>
+                </a:rPr>
+                <a:t>,21</a:t>
+              </a:r>
+            </a:p>
+          </p:txBody>
+        </p:sp>
+        <p:sp>
+          <p:nvSpPr>
+            <p:cNvPr id="49" name="ZoneTexte 48">
+              <a:extLst>
+                <a:ext uri="{FF2B5EF4-FFF2-40B4-BE49-F238E27FC236}">
+                  <a16:creationId xmlns:a16="http://schemas.microsoft.com/office/drawing/2014/main" id="{8E994C1F-4412-4A2B-A37E-38FF31D3B350}"/>
+                </a:ext>
+              </a:extLst>
+            </p:cNvPr>
+            <p:cNvSpPr txBox="1"/>
+            <p:nvPr/>
+          </p:nvSpPr>
+          <p:spPr>
+            <a:xfrm>
+              <a:off x="3698520" y="3681899"/>
+              <a:ext cx="428322" cy="323165"/>
+            </a:xfrm>
+            <a:prstGeom prst="rect">
+              <a:avLst/>
+            </a:prstGeom>
+            <a:noFill/>
+          </p:spPr>
+          <p:txBody>
+            <a:bodyPr wrap="none" rtlCol="0">
+              <a:spAutoFit/>
+            </a:bodyPr>
+            <a:lstStyle/>
+            <a:p>
+              <a:r>
+                <a:rPr lang="fr-FR" sz="1500" dirty="0">
+                  <a:solidFill>
+                    <a:srgbClr val="4A7EBB"/>
+                  </a:solidFill>
+                </a:rPr>
+                <a:t>,24</a:t>
+              </a:r>
+            </a:p>
+          </p:txBody>
+        </p:sp>
+        <p:sp>
+          <p:nvSpPr>
+            <p:cNvPr id="50" name="ZoneTexte 49">
+              <a:extLst>
+                <a:ext uri="{FF2B5EF4-FFF2-40B4-BE49-F238E27FC236}">
+                  <a16:creationId xmlns:a16="http://schemas.microsoft.com/office/drawing/2014/main" id="{D3B9CE1F-B53D-4678-8A1F-7F3FB871FD14}"/>
+                </a:ext>
+              </a:extLst>
+            </p:cNvPr>
+            <p:cNvSpPr txBox="1"/>
+            <p:nvPr/>
+          </p:nvSpPr>
+          <p:spPr>
+            <a:xfrm>
+              <a:off x="4118789" y="3681899"/>
+              <a:ext cx="428322" cy="323165"/>
+            </a:xfrm>
+            <a:prstGeom prst="rect">
+              <a:avLst/>
+            </a:prstGeom>
+            <a:noFill/>
+          </p:spPr>
+          <p:txBody>
+            <a:bodyPr wrap="none" rtlCol="0">
+              <a:spAutoFit/>
+            </a:bodyPr>
+            <a:lstStyle/>
+            <a:p>
+              <a:r>
+                <a:rPr lang="fr-FR" sz="1500" dirty="0">
+                  <a:solidFill>
+                    <a:srgbClr val="4A7EBB"/>
+                  </a:solidFill>
+                </a:rPr>
+                <a:t>,28</a:t>
+              </a:r>
+            </a:p>
+          </p:txBody>
+        </p:sp>
+        <p:sp>
+          <p:nvSpPr>
+            <p:cNvPr id="51" name="ZoneTexte 50">
+              <a:extLst>
+                <a:ext uri="{FF2B5EF4-FFF2-40B4-BE49-F238E27FC236}">
+                  <a16:creationId xmlns:a16="http://schemas.microsoft.com/office/drawing/2014/main" id="{E5DFC3E9-EA7C-478F-AB60-77F6C556F80D}"/>
+                </a:ext>
+              </a:extLst>
+            </p:cNvPr>
+            <p:cNvSpPr txBox="1"/>
+            <p:nvPr/>
+          </p:nvSpPr>
+          <p:spPr>
+            <a:xfrm>
+              <a:off x="1597175" y="3681899"/>
+              <a:ext cx="428322" cy="323165"/>
+            </a:xfrm>
+            <a:prstGeom prst="rect">
+              <a:avLst/>
+            </a:prstGeom>
+            <a:noFill/>
+          </p:spPr>
+          <p:txBody>
+            <a:bodyPr wrap="none" rtlCol="0">
+              <a:spAutoFit/>
+            </a:bodyPr>
+            <a:lstStyle/>
+            <a:p>
+              <a:r>
+                <a:rPr lang="fr-FR" sz="1500" dirty="0">
+                  <a:solidFill>
+                    <a:srgbClr val="4A7EBB"/>
+                  </a:solidFill>
+                </a:rPr>
+                <a:t>,05</a:t>
+              </a:r>
+            </a:p>
+          </p:txBody>
+        </p:sp>
+        <p:sp>
+          <p:nvSpPr>
+            <p:cNvPr id="52" name="ZoneTexte 51">
+              <a:extLst>
+                <a:ext uri="{FF2B5EF4-FFF2-40B4-BE49-F238E27FC236}">
+                  <a16:creationId xmlns:a16="http://schemas.microsoft.com/office/drawing/2014/main" id="{484EC821-13B4-4D9B-AC32-8940625089C8}"/>
+                </a:ext>
+              </a:extLst>
+            </p:cNvPr>
+            <p:cNvSpPr txBox="1"/>
+            <p:nvPr/>
+          </p:nvSpPr>
+          <p:spPr>
+            <a:xfrm>
+              <a:off x="4539058" y="3681899"/>
+              <a:ext cx="428322" cy="323165"/>
+            </a:xfrm>
+            <a:prstGeom prst="rect">
+              <a:avLst/>
+            </a:prstGeom>
+            <a:noFill/>
+          </p:spPr>
+          <p:txBody>
+            <a:bodyPr wrap="none" rtlCol="0">
+              <a:spAutoFit/>
+            </a:bodyPr>
+            <a:lstStyle/>
+            <a:p>
+              <a:r>
+                <a:rPr lang="fr-FR" sz="1500" dirty="0">
+                  <a:solidFill>
+                    <a:srgbClr val="4A7EBB"/>
+                  </a:solidFill>
+                </a:rPr>
+                <a:t>,31</a:t>
+              </a:r>
+            </a:p>
+          </p:txBody>
+        </p:sp>
+        <p:sp>
+          <p:nvSpPr>
+            <p:cNvPr id="53" name="ZoneTexte 52">
+              <a:extLst>
+                <a:ext uri="{FF2B5EF4-FFF2-40B4-BE49-F238E27FC236}">
+                  <a16:creationId xmlns:a16="http://schemas.microsoft.com/office/drawing/2014/main" id="{0D13C1F2-A321-44B3-BE3A-EA6B9A5029AA}"/>
+                </a:ext>
+              </a:extLst>
+            </p:cNvPr>
+            <p:cNvSpPr txBox="1"/>
+            <p:nvPr/>
+          </p:nvSpPr>
+          <p:spPr>
+            <a:xfrm>
+              <a:off x="4959327" y="3681899"/>
+              <a:ext cx="428322" cy="323165"/>
+            </a:xfrm>
+            <a:prstGeom prst="rect">
+              <a:avLst/>
+            </a:prstGeom>
+            <a:noFill/>
+          </p:spPr>
+          <p:txBody>
+            <a:bodyPr wrap="none" rtlCol="0">
+              <a:spAutoFit/>
+            </a:bodyPr>
+            <a:lstStyle/>
+            <a:p>
+              <a:r>
+                <a:rPr lang="fr-FR" sz="1500" dirty="0">
+                  <a:solidFill>
+                    <a:srgbClr val="4A7EBB"/>
+                  </a:solidFill>
+                </a:rPr>
+                <a:t>,34</a:t>
+              </a:r>
+            </a:p>
+          </p:txBody>
+        </p:sp>
+        <p:sp>
+          <p:nvSpPr>
+            <p:cNvPr id="54" name="ZoneTexte 53">
+              <a:extLst>
+                <a:ext uri="{FF2B5EF4-FFF2-40B4-BE49-F238E27FC236}">
+                  <a16:creationId xmlns:a16="http://schemas.microsoft.com/office/drawing/2014/main" id="{61DDB872-EA7E-4A82-BD63-F56B7F62B76A}"/>
+                </a:ext>
+              </a:extLst>
+            </p:cNvPr>
+            <p:cNvSpPr txBox="1"/>
+            <p:nvPr/>
+          </p:nvSpPr>
+          <p:spPr>
+            <a:xfrm>
+              <a:off x="5379596" y="3681899"/>
+              <a:ext cx="428322" cy="323165"/>
+            </a:xfrm>
+            <a:prstGeom prst="rect">
+              <a:avLst/>
+            </a:prstGeom>
+            <a:noFill/>
+          </p:spPr>
+          <p:txBody>
+            <a:bodyPr wrap="none" rtlCol="0">
+              <a:spAutoFit/>
+            </a:bodyPr>
+            <a:lstStyle/>
+            <a:p>
+              <a:r>
+                <a:rPr lang="fr-FR" sz="1500" dirty="0">
+                  <a:solidFill>
+                    <a:srgbClr val="4A7EBB"/>
+                  </a:solidFill>
+                </a:rPr>
+                <a:t>,37</a:t>
+              </a:r>
+            </a:p>
+          </p:txBody>
+        </p:sp>
+        <p:sp>
+          <p:nvSpPr>
+            <p:cNvPr id="67" name="ZoneTexte 66">
+              <a:extLst>
+                <a:ext uri="{FF2B5EF4-FFF2-40B4-BE49-F238E27FC236}">
+                  <a16:creationId xmlns:a16="http://schemas.microsoft.com/office/drawing/2014/main" id="{AA337086-E13C-4836-BD7F-5FEEF33840EE}"/>
+                </a:ext>
+              </a:extLst>
+            </p:cNvPr>
+            <p:cNvSpPr txBox="1"/>
+            <p:nvPr/>
+          </p:nvSpPr>
+          <p:spPr>
+            <a:xfrm>
+              <a:off x="5799862" y="3681899"/>
+              <a:ext cx="428322" cy="323165"/>
+            </a:xfrm>
+            <a:prstGeom prst="rect">
+              <a:avLst/>
+            </a:prstGeom>
+            <a:noFill/>
+          </p:spPr>
+          <p:txBody>
+            <a:bodyPr wrap="none" rtlCol="0">
+              <a:spAutoFit/>
+            </a:bodyPr>
+            <a:lstStyle/>
+            <a:p>
+              <a:r>
+                <a:rPr lang="fr-FR" sz="1500" dirty="0">
+                  <a:solidFill>
+                    <a:srgbClr val="4A7EBB"/>
+                  </a:solidFill>
+                </a:rPr>
+                <a:t>,40</a:t>
+              </a:r>
+            </a:p>
+          </p:txBody>
+        </p:sp>
+        <p:grpSp>
+          <p:nvGrpSpPr>
+            <p:cNvPr id="69" name="Groupe 68">
+              <a:extLst>
+                <a:ext uri="{FF2B5EF4-FFF2-40B4-BE49-F238E27FC236}">
+                  <a16:creationId xmlns:a16="http://schemas.microsoft.com/office/drawing/2014/main" id="{A6BD30FF-EE49-4151-A48B-304901E9DF18}"/>
+                </a:ext>
+              </a:extLst>
+            </p:cNvPr>
+            <p:cNvGrpSpPr/>
+            <p:nvPr/>
+          </p:nvGrpSpPr>
+          <p:grpSpPr>
+            <a:xfrm>
+              <a:off x="1815150" y="3615902"/>
+              <a:ext cx="4249968" cy="126000"/>
+              <a:chOff x="1815150" y="3543894"/>
+              <a:chExt cx="4249968" cy="126000"/>
+            </a:xfrm>
+          </p:grpSpPr>
+          <p:cxnSp>
+            <p:nvCxnSpPr>
+              <p:cNvPr id="22" name="Connecteur droit avec flèche 21">
+                <a:extLst>
+                  <a:ext uri="{FF2B5EF4-FFF2-40B4-BE49-F238E27FC236}">
+                    <a16:creationId xmlns:a16="http://schemas.microsoft.com/office/drawing/2014/main" id="{72415A27-D006-463B-9231-C478339D1D9D}"/>
+                  </a:ext>
+                </a:extLst>
+              </p:cNvPr>
+              <p:cNvCxnSpPr>
+                <a:cxnSpLocks/>
+              </p:cNvCxnSpPr>
+              <p:nvPr/>
+            </p:nvCxnSpPr>
+            <p:spPr>
+              <a:xfrm flipV="1">
+                <a:off x="1815150" y="3543894"/>
+                <a:ext cx="0" cy="126000"/>
+              </a:xfrm>
+              <a:prstGeom prst="straightConnector1">
+                <a:avLst/>
+              </a:prstGeom>
+              <a:ln>
+                <a:tailEnd type="triangle"/>
+              </a:ln>
+            </p:spPr>
+            <p:style>
+              <a:lnRef idx="1">
+                <a:schemeClr val="accent1"/>
+              </a:lnRef>
+              <a:fillRef idx="0">
+                <a:schemeClr val="accent1"/>
+              </a:fillRef>
+              <a:effectRef idx="0">
+                <a:schemeClr val="accent1"/>
+              </a:effectRef>
+              <a:fontRef idx="minor">
+                <a:schemeClr val="tx1"/>
+              </a:fontRef>
+            </p:style>
+          </p:cxnSp>
+          <p:cxnSp>
+            <p:nvCxnSpPr>
+              <p:cNvPr id="58" name="Connecteur droit avec flèche 57">
+                <a:extLst>
+                  <a:ext uri="{FF2B5EF4-FFF2-40B4-BE49-F238E27FC236}">
+                    <a16:creationId xmlns:a16="http://schemas.microsoft.com/office/drawing/2014/main" id="{E7E6FD5A-74B8-4737-B27C-6E9983E01A45}"/>
+                  </a:ext>
+                </a:extLst>
+              </p:cNvPr>
+              <p:cNvCxnSpPr>
+                <a:cxnSpLocks/>
+              </p:cNvCxnSpPr>
+              <p:nvPr/>
+            </p:nvCxnSpPr>
+            <p:spPr>
+              <a:xfrm flipV="1">
+                <a:off x="2240147" y="3543894"/>
+                <a:ext cx="0" cy="126000"/>
+              </a:xfrm>
+              <a:prstGeom prst="straightConnector1">
+                <a:avLst/>
+              </a:prstGeom>
+              <a:ln>
+                <a:tailEnd type="triangle"/>
+              </a:ln>
+            </p:spPr>
+            <p:style>
+              <a:lnRef idx="1">
+                <a:schemeClr val="accent1"/>
+              </a:lnRef>
+              <a:fillRef idx="0">
+                <a:schemeClr val="accent1"/>
+              </a:fillRef>
+              <a:effectRef idx="0">
+                <a:schemeClr val="accent1"/>
+              </a:effectRef>
+              <a:fontRef idx="minor">
+                <a:schemeClr val="tx1"/>
+              </a:fontRef>
+            </p:style>
+          </p:cxnSp>
+          <p:cxnSp>
+            <p:nvCxnSpPr>
+              <p:cNvPr id="59" name="Connecteur droit avec flèche 58">
+                <a:extLst>
+                  <a:ext uri="{FF2B5EF4-FFF2-40B4-BE49-F238E27FC236}">
+                    <a16:creationId xmlns:a16="http://schemas.microsoft.com/office/drawing/2014/main" id="{D00E4620-71B1-4C58-BD7B-36E71F4B72C0}"/>
+                  </a:ext>
+                </a:extLst>
+              </p:cNvPr>
+              <p:cNvCxnSpPr>
+                <a:cxnSpLocks/>
+              </p:cNvCxnSpPr>
+              <p:nvPr/>
+            </p:nvCxnSpPr>
+            <p:spPr>
+              <a:xfrm flipV="1">
+                <a:off x="2665144" y="3543894"/>
+                <a:ext cx="0" cy="126000"/>
+              </a:xfrm>
+              <a:prstGeom prst="straightConnector1">
+                <a:avLst/>
+              </a:prstGeom>
+              <a:ln>
+                <a:tailEnd type="triangle"/>
+              </a:ln>
+            </p:spPr>
+            <p:style>
+              <a:lnRef idx="1">
+                <a:schemeClr val="accent1"/>
+              </a:lnRef>
+              <a:fillRef idx="0">
+                <a:schemeClr val="accent1"/>
+              </a:fillRef>
+              <a:effectRef idx="0">
+                <a:schemeClr val="accent1"/>
+              </a:effectRef>
+              <a:fontRef idx="minor">
+                <a:schemeClr val="tx1"/>
+              </a:fontRef>
+            </p:style>
+          </p:cxnSp>
+          <p:cxnSp>
+            <p:nvCxnSpPr>
+              <p:cNvPr id="60" name="Connecteur droit avec flèche 59">
+                <a:extLst>
+                  <a:ext uri="{FF2B5EF4-FFF2-40B4-BE49-F238E27FC236}">
+                    <a16:creationId xmlns:a16="http://schemas.microsoft.com/office/drawing/2014/main" id="{9F9B0E96-9DFF-45B5-B54C-3964D8239A05}"/>
+                  </a:ext>
+                </a:extLst>
+              </p:cNvPr>
+              <p:cNvCxnSpPr>
+                <a:cxnSpLocks/>
+              </p:cNvCxnSpPr>
+              <p:nvPr/>
+            </p:nvCxnSpPr>
+            <p:spPr>
+              <a:xfrm flipV="1">
+                <a:off x="3090141" y="3543894"/>
+                <a:ext cx="0" cy="126000"/>
+              </a:xfrm>
+              <a:prstGeom prst="straightConnector1">
+                <a:avLst/>
+              </a:prstGeom>
+              <a:ln>
+                <a:tailEnd type="triangle"/>
+              </a:ln>
+            </p:spPr>
+            <p:style>
+              <a:lnRef idx="1">
+                <a:schemeClr val="accent1"/>
+              </a:lnRef>
+              <a:fillRef idx="0">
+                <a:schemeClr val="accent1"/>
+              </a:fillRef>
+              <a:effectRef idx="0">
+                <a:schemeClr val="accent1"/>
+              </a:effectRef>
+              <a:fontRef idx="minor">
+                <a:schemeClr val="tx1"/>
+              </a:fontRef>
+            </p:style>
+          </p:cxnSp>
+          <p:cxnSp>
+            <p:nvCxnSpPr>
+              <p:cNvPr id="61" name="Connecteur droit avec flèche 60">
+                <a:extLst>
+                  <a:ext uri="{FF2B5EF4-FFF2-40B4-BE49-F238E27FC236}">
+                    <a16:creationId xmlns:a16="http://schemas.microsoft.com/office/drawing/2014/main" id="{118D8905-683E-4026-895C-E917ED894FD4}"/>
+                  </a:ext>
+                </a:extLst>
+              </p:cNvPr>
+              <p:cNvCxnSpPr>
+                <a:cxnSpLocks/>
+              </p:cNvCxnSpPr>
+              <p:nvPr/>
+            </p:nvCxnSpPr>
+            <p:spPr>
+              <a:xfrm flipV="1">
+                <a:off x="3515138" y="3543894"/>
+                <a:ext cx="0" cy="126000"/>
+              </a:xfrm>
+              <a:prstGeom prst="straightConnector1">
+                <a:avLst/>
+              </a:prstGeom>
+              <a:ln>
+                <a:tailEnd type="triangle"/>
+              </a:ln>
+            </p:spPr>
+            <p:style>
+              <a:lnRef idx="1">
+                <a:schemeClr val="accent1"/>
+              </a:lnRef>
+              <a:fillRef idx="0">
+                <a:schemeClr val="accent1"/>
+              </a:fillRef>
+              <a:effectRef idx="0">
+                <a:schemeClr val="accent1"/>
+              </a:effectRef>
+              <a:fontRef idx="minor">
+                <a:schemeClr val="tx1"/>
+              </a:fontRef>
+            </p:style>
+          </p:cxnSp>
+          <p:cxnSp>
+            <p:nvCxnSpPr>
+              <p:cNvPr id="62" name="Connecteur droit avec flèche 61">
+                <a:extLst>
+                  <a:ext uri="{FF2B5EF4-FFF2-40B4-BE49-F238E27FC236}">
+                    <a16:creationId xmlns:a16="http://schemas.microsoft.com/office/drawing/2014/main" id="{CE8D57A1-A1C3-4382-BD6D-EEC3F57705AE}"/>
+                  </a:ext>
+                </a:extLst>
+              </p:cNvPr>
+              <p:cNvCxnSpPr>
+                <a:cxnSpLocks/>
+              </p:cNvCxnSpPr>
+              <p:nvPr/>
+            </p:nvCxnSpPr>
+            <p:spPr>
+              <a:xfrm flipV="1">
+                <a:off x="3940135" y="3543894"/>
+                <a:ext cx="0" cy="126000"/>
+              </a:xfrm>
+              <a:prstGeom prst="straightConnector1">
+                <a:avLst/>
+              </a:prstGeom>
+              <a:ln>
+                <a:tailEnd type="triangle"/>
+              </a:ln>
+            </p:spPr>
+            <p:style>
+              <a:lnRef idx="1">
+                <a:schemeClr val="accent1"/>
+              </a:lnRef>
+              <a:fillRef idx="0">
+                <a:schemeClr val="accent1"/>
+              </a:fillRef>
+              <a:effectRef idx="0">
+                <a:schemeClr val="accent1"/>
+              </a:effectRef>
+              <a:fontRef idx="minor">
+                <a:schemeClr val="tx1"/>
+              </a:fontRef>
+            </p:style>
+          </p:cxnSp>
+          <p:cxnSp>
+            <p:nvCxnSpPr>
+              <p:cNvPr id="63" name="Connecteur droit avec flèche 62">
+                <a:extLst>
+                  <a:ext uri="{FF2B5EF4-FFF2-40B4-BE49-F238E27FC236}">
+                    <a16:creationId xmlns:a16="http://schemas.microsoft.com/office/drawing/2014/main" id="{D1714737-F0F1-4675-AEDD-7F1C9F1F8DF0}"/>
+                  </a:ext>
+                </a:extLst>
+              </p:cNvPr>
+              <p:cNvCxnSpPr>
+                <a:cxnSpLocks/>
+              </p:cNvCxnSpPr>
+              <p:nvPr/>
+            </p:nvCxnSpPr>
+            <p:spPr>
+              <a:xfrm flipV="1">
+                <a:off x="4365132" y="3543894"/>
+                <a:ext cx="0" cy="126000"/>
+              </a:xfrm>
+              <a:prstGeom prst="straightConnector1">
+                <a:avLst/>
+              </a:prstGeom>
+              <a:ln>
+                <a:tailEnd type="triangle"/>
+              </a:ln>
+            </p:spPr>
+            <p:style>
+              <a:lnRef idx="1">
+                <a:schemeClr val="accent1"/>
+              </a:lnRef>
+              <a:fillRef idx="0">
+                <a:schemeClr val="accent1"/>
+              </a:fillRef>
+              <a:effectRef idx="0">
+                <a:schemeClr val="accent1"/>
+              </a:effectRef>
+              <a:fontRef idx="minor">
+                <a:schemeClr val="tx1"/>
+              </a:fontRef>
+            </p:style>
+          </p:cxnSp>
+          <p:cxnSp>
+            <p:nvCxnSpPr>
+              <p:cNvPr id="64" name="Connecteur droit avec flèche 63">
+                <a:extLst>
+                  <a:ext uri="{FF2B5EF4-FFF2-40B4-BE49-F238E27FC236}">
+                    <a16:creationId xmlns:a16="http://schemas.microsoft.com/office/drawing/2014/main" id="{13A2C10C-8B4E-4FCE-A1DE-D015AD3CDADA}"/>
+                  </a:ext>
+                </a:extLst>
+              </p:cNvPr>
+              <p:cNvCxnSpPr>
+                <a:cxnSpLocks/>
+              </p:cNvCxnSpPr>
+              <p:nvPr/>
+            </p:nvCxnSpPr>
+            <p:spPr>
+              <a:xfrm flipV="1">
+                <a:off x="4790129" y="3543894"/>
+                <a:ext cx="0" cy="126000"/>
+              </a:xfrm>
+              <a:prstGeom prst="straightConnector1">
+                <a:avLst/>
+              </a:prstGeom>
+              <a:ln>
+                <a:tailEnd type="triangle"/>
+              </a:ln>
+            </p:spPr>
+            <p:style>
+              <a:lnRef idx="1">
+                <a:schemeClr val="accent1"/>
+              </a:lnRef>
+              <a:fillRef idx="0">
+                <a:schemeClr val="accent1"/>
+              </a:fillRef>
+              <a:effectRef idx="0">
+                <a:schemeClr val="accent1"/>
+              </a:effectRef>
+              <a:fontRef idx="minor">
+                <a:schemeClr val="tx1"/>
+              </a:fontRef>
+            </p:style>
+          </p:cxnSp>
+          <p:cxnSp>
+            <p:nvCxnSpPr>
+              <p:cNvPr id="65" name="Connecteur droit avec flèche 64">
+                <a:extLst>
+                  <a:ext uri="{FF2B5EF4-FFF2-40B4-BE49-F238E27FC236}">
+                    <a16:creationId xmlns:a16="http://schemas.microsoft.com/office/drawing/2014/main" id="{D9D990ED-7427-4DCE-9A61-1E2DCE5A3E72}"/>
+                  </a:ext>
+                </a:extLst>
+              </p:cNvPr>
+              <p:cNvCxnSpPr>
+                <a:cxnSpLocks/>
+              </p:cNvCxnSpPr>
+              <p:nvPr/>
+            </p:nvCxnSpPr>
+            <p:spPr>
+              <a:xfrm flipV="1">
+                <a:off x="5640123" y="3543894"/>
+                <a:ext cx="0" cy="126000"/>
+              </a:xfrm>
+              <a:prstGeom prst="straightConnector1">
+                <a:avLst/>
+              </a:prstGeom>
+              <a:ln>
+                <a:tailEnd type="triangle"/>
+              </a:ln>
+            </p:spPr>
+            <p:style>
+              <a:lnRef idx="1">
+                <a:schemeClr val="accent1"/>
+              </a:lnRef>
+              <a:fillRef idx="0">
+                <a:schemeClr val="accent1"/>
+              </a:fillRef>
+              <a:effectRef idx="0">
+                <a:schemeClr val="accent1"/>
+              </a:effectRef>
+              <a:fontRef idx="minor">
+                <a:schemeClr val="tx1"/>
+              </a:fontRef>
+            </p:style>
+          </p:cxnSp>
+          <p:cxnSp>
+            <p:nvCxnSpPr>
+              <p:cNvPr id="66" name="Connecteur droit avec flèche 65">
+                <a:extLst>
+                  <a:ext uri="{FF2B5EF4-FFF2-40B4-BE49-F238E27FC236}">
+                    <a16:creationId xmlns:a16="http://schemas.microsoft.com/office/drawing/2014/main" id="{C84673C5-4FBC-46DE-89D3-1B19B9070EE1}"/>
+                  </a:ext>
+                </a:extLst>
+              </p:cNvPr>
+              <p:cNvCxnSpPr>
+                <a:cxnSpLocks/>
+              </p:cNvCxnSpPr>
+              <p:nvPr/>
+            </p:nvCxnSpPr>
+            <p:spPr>
+              <a:xfrm flipV="1">
+                <a:off x="5215126" y="3543894"/>
+                <a:ext cx="0" cy="126000"/>
+              </a:xfrm>
+              <a:prstGeom prst="straightConnector1">
+                <a:avLst/>
+              </a:prstGeom>
+              <a:ln>
+                <a:tailEnd type="triangle"/>
+              </a:ln>
+            </p:spPr>
+            <p:style>
+              <a:lnRef idx="1">
+                <a:schemeClr val="accent1"/>
+              </a:lnRef>
+              <a:fillRef idx="0">
+                <a:schemeClr val="accent1"/>
+              </a:fillRef>
+              <a:effectRef idx="0">
+                <a:schemeClr val="accent1"/>
+              </a:effectRef>
+              <a:fontRef idx="minor">
+                <a:schemeClr val="tx1"/>
+              </a:fontRef>
+            </p:style>
+          </p:cxnSp>
+          <p:cxnSp>
+            <p:nvCxnSpPr>
+              <p:cNvPr id="68" name="Connecteur droit avec flèche 67">
+                <a:extLst>
+                  <a:ext uri="{FF2B5EF4-FFF2-40B4-BE49-F238E27FC236}">
+                    <a16:creationId xmlns:a16="http://schemas.microsoft.com/office/drawing/2014/main" id="{00448FDC-7ECF-4047-9817-F7043D43C211}"/>
+                  </a:ext>
+                </a:extLst>
+              </p:cNvPr>
+              <p:cNvCxnSpPr>
+                <a:cxnSpLocks/>
+              </p:cNvCxnSpPr>
+              <p:nvPr/>
+            </p:nvCxnSpPr>
+            <p:spPr>
+              <a:xfrm flipV="1">
+                <a:off x="6065118" y="3543894"/>
+                <a:ext cx="0" cy="126000"/>
+              </a:xfrm>
+              <a:prstGeom prst="straightConnector1">
+                <a:avLst/>
+              </a:prstGeom>
+              <a:ln>
+                <a:tailEnd type="triangle"/>
+              </a:ln>
+            </p:spPr>
+            <p:style>
+              <a:lnRef idx="1">
+                <a:schemeClr val="accent1"/>
+              </a:lnRef>
+              <a:fillRef idx="0">
+                <a:schemeClr val="accent1"/>
+              </a:fillRef>
+              <a:effectRef idx="0">
+                <a:schemeClr val="accent1"/>
+              </a:effectRef>
+              <a:fontRef idx="minor">
+                <a:schemeClr val="tx1"/>
+              </a:fontRef>
+            </p:style>
+          </p:cxnSp>
+        </p:grpSp>
+      </p:grpSp>
+      <p:pic>
+        <p:nvPicPr>
+          <p:cNvPr id="20" name="Image 19">
+            <a:extLst>
+              <a:ext uri="{FF2B5EF4-FFF2-40B4-BE49-F238E27FC236}">
+                <a16:creationId xmlns:a16="http://schemas.microsoft.com/office/drawing/2014/main" id="{58BE49E3-7292-4145-AFD2-1E43F3DD9E62}"/>
+              </a:ext>
+            </a:extLst>
+          </p:cNvPr>
+          <p:cNvPicPr>
+            <a:picLocks noChangeAspect="1"/>
+          </p:cNvPicPr>
+          <p:nvPr/>
+        </p:nvPicPr>
+        <p:blipFill rotWithShape="1">
+          <a:blip r:embed="rId2"/>
+          <a:srcRect l="1" r="16649"/>
+          <a:stretch/>
+        </p:blipFill>
+        <p:spPr>
+          <a:xfrm>
+            <a:off x="1813980" y="3140968"/>
+            <a:ext cx="4253233" cy="396274"/>
+          </a:xfrm>
+          <a:prstGeom prst="rect">
+            <a:avLst/>
+          </a:prstGeom>
+        </p:spPr>
+      </p:pic>
       <p:sp>
         <p:nvSpPr>
           <p:cNvPr id="2" name="Titre 1">
@@ -3399,7 +4322,7 @@
           <a:p>
             <a:r>
               <a:rPr lang="fr-FR" dirty="0"/>
-              <a:t>Gamme de couleurs pour température</a:t>
+              <a:t>Gamme de couleurs pour chlorophylle</a:t>
             </a:r>
             <a:br>
               <a:rPr lang="fr-FR" dirty="0"/>
@@ -3425,7 +4348,7 @@
         </p:nvSpPr>
         <p:spPr>
           <a:xfrm>
-            <a:off x="5923197" y="1116746"/>
+            <a:off x="5680266" y="2232911"/>
             <a:ext cx="288032" cy="288032"/>
           </a:xfrm>
           <a:prstGeom prst="rect">
@@ -3474,7 +4397,7 @@
         </p:nvSpPr>
         <p:spPr>
           <a:xfrm>
-            <a:off x="3187915" y="1116746"/>
+            <a:off x="2944984" y="2232911"/>
             <a:ext cx="288032" cy="288032"/>
           </a:xfrm>
           <a:prstGeom prst="rect">
@@ -3523,7 +4446,7 @@
         </p:nvSpPr>
         <p:spPr>
           <a:xfrm>
-            <a:off x="3578670" y="1116746"/>
+            <a:off x="3335739" y="2232911"/>
             <a:ext cx="288032" cy="288032"/>
           </a:xfrm>
           <a:prstGeom prst="rect">
@@ -3572,7 +4495,7 @@
         </p:nvSpPr>
         <p:spPr>
           <a:xfrm>
-            <a:off x="3969425" y="1116746"/>
+            <a:off x="3726494" y="2232911"/>
             <a:ext cx="288032" cy="288032"/>
           </a:xfrm>
           <a:prstGeom prst="rect">
@@ -3621,7 +4544,7 @@
         </p:nvSpPr>
         <p:spPr>
           <a:xfrm>
-            <a:off x="4360180" y="1116746"/>
+            <a:off x="4117249" y="2232911"/>
             <a:ext cx="288032" cy="288032"/>
           </a:xfrm>
           <a:prstGeom prst="rect">
@@ -3670,7 +4593,7 @@
         </p:nvSpPr>
         <p:spPr>
           <a:xfrm>
-            <a:off x="4750935" y="1116746"/>
+            <a:off x="4508004" y="2232911"/>
             <a:ext cx="288032" cy="288032"/>
           </a:xfrm>
           <a:prstGeom prst="rect">
@@ -3719,7 +4642,7 @@
         </p:nvSpPr>
         <p:spPr>
           <a:xfrm>
-            <a:off x="5141690" y="1116746"/>
+            <a:off x="4898759" y="2232911"/>
             <a:ext cx="288032" cy="288032"/>
           </a:xfrm>
           <a:prstGeom prst="rect">
@@ -3768,7 +4691,7 @@
         </p:nvSpPr>
         <p:spPr>
           <a:xfrm>
-            <a:off x="5532445" y="1116746"/>
+            <a:off x="5289514" y="2232911"/>
             <a:ext cx="288032" cy="288032"/>
           </a:xfrm>
           <a:prstGeom prst="rect">
@@ -3817,7 +4740,7 @@
         </p:nvSpPr>
         <p:spPr>
           <a:xfrm>
-            <a:off x="5923197" y="1116746"/>
+            <a:off x="5680266" y="2232911"/>
             <a:ext cx="288032" cy="288032"/>
           </a:xfrm>
           <a:prstGeom prst="rect">
@@ -3866,8 +4789,8 @@
         </p:nvSpPr>
         <p:spPr>
           <a:xfrm>
-            <a:off x="-52894" y="2985025"/>
-            <a:ext cx="1812099" cy="707886"/>
+            <a:off x="295807" y="3061969"/>
+            <a:ext cx="1378198" cy="553998"/>
           </a:xfrm>
           <a:prstGeom prst="rect">
             <a:avLst/>
@@ -3878,41 +4801,39 @@
           <a:bodyPr wrap="none" rtlCol="0">
             <a:spAutoFit/>
           </a:bodyPr>
-          <a:lstStyle/>
-          <a:p>
-            <a:pPr algn="ctr"/>
-            <a:r>
-              <a:rPr lang="fr-FR" sz="2000" dirty="0" err="1">
-                <a:latin typeface="+mj-lt"/>
-              </a:rPr>
-              <a:t>Sea</a:t>
-            </a:r>
-            <a:r>
-              <a:rPr lang="fr-FR" sz="2000" dirty="0">
-                <a:latin typeface="+mj-lt"/>
-              </a:rPr>
-              <a:t>-surface</a:t>
+          <a:lstStyle>
+            <a:defPPr>
+              <a:defRPr lang="fr-FR"/>
+            </a:defPPr>
+            <a:lvl1pPr>
+              <a:defRPr sz="1500">
+                <a:solidFill>
+                  <a:srgbClr val="4A7EBB"/>
+                </a:solidFill>
+              </a:defRPr>
+            </a:lvl1pPr>
+          </a:lstStyle>
+          <a:p>
+            <a:pPr algn="r">
+              <a:lnSpc>
+                <a:spcPts val="1800"/>
+              </a:lnSpc>
+            </a:pPr>
+            <a:r>
+              <a:rPr lang="fr-FR" sz="1600" dirty="0"/>
+              <a:t>Chlorophylle a</a:t>
             </a:r>
             <a:br>
-              <a:rPr lang="fr-FR" sz="2000" dirty="0">
-                <a:latin typeface="+mj-lt"/>
-              </a:rPr>
+              <a:rPr lang="fr-FR" sz="1600" dirty="0"/>
             </a:br>
             <a:r>
-              <a:rPr lang="fr-FR" sz="2000" dirty="0" err="1">
-                <a:latin typeface="+mj-lt"/>
-              </a:rPr>
-              <a:t>temperature</a:t>
-            </a:r>
-            <a:r>
-              <a:rPr lang="fr-FR" sz="2000" dirty="0">
-                <a:latin typeface="+mj-lt"/>
-              </a:rPr>
-              <a:t> °C</a:t>
-            </a:r>
-            <a:endParaRPr lang="fr-FR" sz="2000" baseline="30000" dirty="0">
-              <a:latin typeface="+mj-lt"/>
-            </a:endParaRPr>
+              <a:rPr lang="fr-FR" sz="1600" dirty="0"/>
+              <a:t>mg/m</a:t>
+            </a:r>
+            <a:r>
+              <a:rPr lang="fr-FR" sz="1600" baseline="30000" dirty="0"/>
+              <a:t>3</a:t>
+            </a:r>
           </a:p>
         </p:txBody>
       </p:sp>
@@ -3930,7 +4851,7 @@
         </p:nvSpPr>
         <p:spPr>
           <a:xfrm>
-            <a:off x="3548973" y="1413781"/>
+            <a:off x="3306042" y="2529946"/>
             <a:ext cx="359394" cy="369332"/>
           </a:xfrm>
           <a:prstGeom prst="rect">
@@ -3965,7 +4886,7 @@
         </p:nvSpPr>
         <p:spPr>
           <a:xfrm>
-            <a:off x="3909013" y="1413781"/>
+            <a:off x="3666082" y="2529946"/>
             <a:ext cx="359394" cy="369332"/>
           </a:xfrm>
           <a:prstGeom prst="rect">
@@ -4000,7 +4921,7 @@
         </p:nvSpPr>
         <p:spPr>
           <a:xfrm>
-            <a:off x="4341061" y="1413781"/>
+            <a:off x="4098130" y="2529946"/>
             <a:ext cx="359394" cy="369332"/>
           </a:xfrm>
           <a:prstGeom prst="rect">
@@ -4035,7 +4956,7 @@
         </p:nvSpPr>
         <p:spPr>
           <a:xfrm>
-            <a:off x="4656091" y="1413781"/>
+            <a:off x="4413160" y="2529946"/>
             <a:ext cx="476412" cy="369332"/>
           </a:xfrm>
           <a:prstGeom prst="rect">
@@ -4070,7 +4991,7 @@
         </p:nvSpPr>
         <p:spPr>
           <a:xfrm>
-            <a:off x="5097262" y="1413781"/>
+            <a:off x="4854331" y="2529946"/>
             <a:ext cx="359394" cy="369332"/>
           </a:xfrm>
           <a:prstGeom prst="rect">
@@ -4105,7 +5026,7 @@
         </p:nvSpPr>
         <p:spPr>
           <a:xfrm>
-            <a:off x="5465998" y="1413781"/>
+            <a:off x="5223067" y="2529946"/>
             <a:ext cx="417102" cy="369332"/>
           </a:xfrm>
           <a:prstGeom prst="rect">
@@ -4140,7 +5061,7 @@
         </p:nvSpPr>
         <p:spPr>
           <a:xfrm>
-            <a:off x="3058551" y="1413781"/>
+            <a:off x="2815620" y="2529946"/>
             <a:ext cx="474810" cy="369332"/>
           </a:xfrm>
           <a:prstGeom prst="rect">
@@ -4175,7 +5096,7 @@
         </p:nvSpPr>
         <p:spPr>
           <a:xfrm>
-            <a:off x="5853463" y="1444558"/>
+            <a:off x="5610532" y="2560723"/>
             <a:ext cx="502061" cy="307777"/>
           </a:xfrm>
           <a:prstGeom prst="rect">
@@ -4216,7 +5137,9 @@
           <a:prstGeom prst="rect">
             <a:avLst/>
           </a:prstGeom>
-          <a:noFill/>
+          <a:solidFill>
+            <a:srgbClr val="C1FE00"/>
+          </a:solidFill>
           <a:ln w="9525"/>
         </p:spPr>
         <p:style>
@@ -4245,23 +5168,20 @@
           <a:lstStyle/>
           <a:p>
             <a:pPr algn="ctr" defTabSz="685800"/>
-            <a:r>
-              <a:rPr lang="fr-FR" sz="1350" dirty="0">
-                <a:ln w="0"/>
-                <a:solidFill>
-                  <a:schemeClr val="tx1"/>
-                </a:solidFill>
-                <a:effectLst>
-                  <a:outerShdw blurRad="38100" dist="19050" dir="2700000" algn="tl" rotWithShape="0">
-                    <a:schemeClr val="dk1">
-                      <a:alpha val="40000"/>
-                    </a:schemeClr>
-                  </a:outerShdw>
-                </a:effectLst>
-                <a:latin typeface="Calibri" panose="020F0502020204030204"/>
-              </a:rPr>
-              <a:t>19</a:t>
-            </a:r>
+            <a:endParaRPr lang="fr-FR" sz="1350" dirty="0">
+              <a:ln w="0"/>
+              <a:solidFill>
+                <a:schemeClr val="tx1"/>
+              </a:solidFill>
+              <a:effectLst>
+                <a:outerShdw blurRad="38100" dist="19050" dir="2700000" algn="tl" rotWithShape="0">
+                  <a:schemeClr val="dk1">
+                    <a:alpha val="40000"/>
+                  </a:schemeClr>
+                </a:outerShdw>
+              </a:effectLst>
+              <a:latin typeface="Calibri" panose="020F0502020204030204"/>
+            </a:endParaRPr>
           </a:p>
         </p:txBody>
       </p:sp>
@@ -4285,7 +5205,9 @@
           <a:prstGeom prst="rect">
             <a:avLst/>
           </a:prstGeom>
-          <a:noFill/>
+          <a:solidFill>
+            <a:srgbClr val="A8FF02"/>
+          </a:solidFill>
           <a:ln w="9525"/>
         </p:spPr>
         <p:style>
@@ -4314,23 +5236,20 @@
           <a:lstStyle/>
           <a:p>
             <a:pPr algn="ctr" defTabSz="685800"/>
-            <a:r>
-              <a:rPr lang="fr-FR" sz="1350" dirty="0">
-                <a:ln w="0"/>
-                <a:solidFill>
-                  <a:schemeClr val="tx1"/>
-                </a:solidFill>
-                <a:effectLst>
-                  <a:outerShdw blurRad="38100" dist="19050" dir="2700000" algn="tl" rotWithShape="0">
-                    <a:schemeClr val="dk1">
-                      <a:alpha val="40000"/>
-                    </a:schemeClr>
-                  </a:outerShdw>
-                </a:effectLst>
-                <a:latin typeface="Calibri" panose="020F0502020204030204"/>
-              </a:rPr>
-              <a:t>20</a:t>
-            </a:r>
+            <a:endParaRPr lang="fr-FR" sz="1350" dirty="0">
+              <a:ln w="0"/>
+              <a:solidFill>
+                <a:schemeClr val="tx1"/>
+              </a:solidFill>
+              <a:effectLst>
+                <a:outerShdw blurRad="38100" dist="19050" dir="2700000" algn="tl" rotWithShape="0">
+                  <a:schemeClr val="dk1">
+                    <a:alpha val="40000"/>
+                  </a:schemeClr>
+                </a:outerShdw>
+              </a:effectLst>
+              <a:latin typeface="Calibri" panose="020F0502020204030204"/>
+            </a:endParaRPr>
           </a:p>
         </p:txBody>
       </p:sp>
@@ -4354,7 +5273,9 @@
           <a:prstGeom prst="rect">
             <a:avLst/>
           </a:prstGeom>
-          <a:noFill/>
+          <a:solidFill>
+            <a:srgbClr val="7FF700"/>
+          </a:solidFill>
           <a:ln w="9525"/>
         </p:spPr>
         <p:style>
@@ -4383,23 +5304,20 @@
           <a:lstStyle/>
           <a:p>
             <a:pPr algn="ctr" defTabSz="685800"/>
-            <a:r>
-              <a:rPr lang="fr-FR" sz="1350" dirty="0">
-                <a:ln w="0"/>
-                <a:solidFill>
-                  <a:schemeClr val="tx1"/>
-                </a:solidFill>
-                <a:effectLst>
-                  <a:outerShdw blurRad="38100" dist="19050" dir="2700000" algn="tl" rotWithShape="0">
-                    <a:schemeClr val="dk1">
-                      <a:alpha val="40000"/>
-                    </a:schemeClr>
-                  </a:outerShdw>
-                </a:effectLst>
-                <a:latin typeface="Calibri" panose="020F0502020204030204"/>
-              </a:rPr>
-              <a:t>21</a:t>
-            </a:r>
+            <a:endParaRPr lang="fr-FR" sz="1350" dirty="0">
+              <a:ln w="0"/>
+              <a:solidFill>
+                <a:schemeClr val="tx1"/>
+              </a:solidFill>
+              <a:effectLst>
+                <a:outerShdw blurRad="38100" dist="19050" dir="2700000" algn="tl" rotWithShape="0">
+                  <a:schemeClr val="dk1">
+                    <a:alpha val="40000"/>
+                  </a:schemeClr>
+                </a:outerShdw>
+              </a:effectLst>
+              <a:latin typeface="Calibri" panose="020F0502020204030204"/>
+            </a:endParaRPr>
           </a:p>
         </p:txBody>
       </p:sp>
@@ -4423,7 +5341,9 @@
           <a:prstGeom prst="rect">
             <a:avLst/>
           </a:prstGeom>
-          <a:noFill/>
+          <a:solidFill>
+            <a:srgbClr val="55EE00"/>
+          </a:solidFill>
           <a:ln w="9525"/>
         </p:spPr>
         <p:style>
@@ -4452,23 +5372,20 @@
           <a:lstStyle/>
           <a:p>
             <a:pPr algn="ctr" defTabSz="685800"/>
-            <a:r>
-              <a:rPr lang="fr-FR" sz="1350" dirty="0">
-                <a:ln w="0"/>
-                <a:solidFill>
-                  <a:schemeClr val="tx1"/>
-                </a:solidFill>
-                <a:effectLst>
-                  <a:outerShdw blurRad="38100" dist="19050" dir="2700000" algn="tl" rotWithShape="0">
-                    <a:schemeClr val="dk1">
-                      <a:alpha val="40000"/>
-                    </a:schemeClr>
-                  </a:outerShdw>
-                </a:effectLst>
-                <a:latin typeface="Calibri" panose="020F0502020204030204"/>
-              </a:rPr>
-              <a:t>22</a:t>
-            </a:r>
+            <a:endParaRPr lang="fr-FR" sz="1350" dirty="0">
+              <a:ln w="0"/>
+              <a:solidFill>
+                <a:schemeClr val="tx1"/>
+              </a:solidFill>
+              <a:effectLst>
+                <a:outerShdw blurRad="38100" dist="19050" dir="2700000" algn="tl" rotWithShape="0">
+                  <a:schemeClr val="dk1">
+                    <a:alpha val="40000"/>
+                  </a:schemeClr>
+                </a:outerShdw>
+              </a:effectLst>
+              <a:latin typeface="Calibri" panose="020F0502020204030204"/>
+            </a:endParaRPr>
           </a:p>
         </p:txBody>
       </p:sp>
@@ -4521,23 +5438,20 @@
           <a:lstStyle/>
           <a:p>
             <a:pPr algn="ctr" defTabSz="685800"/>
-            <a:r>
-              <a:rPr lang="fr-FR" sz="1350" dirty="0">
-                <a:ln w="0"/>
-                <a:solidFill>
-                  <a:schemeClr val="tx1"/>
-                </a:solidFill>
-                <a:effectLst>
-                  <a:outerShdw blurRad="38100" dist="19050" dir="2700000" algn="tl" rotWithShape="0">
-                    <a:schemeClr val="dk1">
-                      <a:alpha val="40000"/>
-                    </a:schemeClr>
-                  </a:outerShdw>
-                </a:effectLst>
-                <a:latin typeface="Calibri" panose="020F0502020204030204"/>
-              </a:rPr>
-              <a:t>23</a:t>
-            </a:r>
+            <a:endParaRPr lang="fr-FR" sz="1350" dirty="0">
+              <a:ln w="0"/>
+              <a:solidFill>
+                <a:schemeClr val="tx1"/>
+              </a:solidFill>
+              <a:effectLst>
+                <a:outerShdw blurRad="38100" dist="19050" dir="2700000" algn="tl" rotWithShape="0">
+                  <a:schemeClr val="dk1">
+                    <a:alpha val="40000"/>
+                  </a:schemeClr>
+                </a:outerShdw>
+              </a:effectLst>
+              <a:latin typeface="Calibri" panose="020F0502020204030204"/>
+            </a:endParaRPr>
           </a:p>
         </p:txBody>
       </p:sp>
@@ -4590,23 +5504,20 @@
           <a:lstStyle/>
           <a:p>
             <a:pPr algn="ctr" defTabSz="685800"/>
-            <a:r>
-              <a:rPr lang="fr-FR" sz="1350" dirty="0">
-                <a:ln w="0"/>
-                <a:solidFill>
-                  <a:schemeClr val="tx1"/>
-                </a:solidFill>
-                <a:effectLst>
-                  <a:outerShdw blurRad="38100" dist="19050" dir="2700000" algn="tl" rotWithShape="0">
-                    <a:schemeClr val="dk1">
-                      <a:alpha val="40000"/>
-                    </a:schemeClr>
-                  </a:outerShdw>
-                </a:effectLst>
-                <a:latin typeface="Calibri" panose="020F0502020204030204"/>
-              </a:rPr>
-              <a:t>24</a:t>
-            </a:r>
+            <a:endParaRPr lang="fr-FR" sz="1350" dirty="0">
+              <a:ln w="0"/>
+              <a:solidFill>
+                <a:schemeClr val="tx1"/>
+              </a:solidFill>
+              <a:effectLst>
+                <a:outerShdw blurRad="38100" dist="19050" dir="2700000" algn="tl" rotWithShape="0">
+                  <a:schemeClr val="dk1">
+                    <a:alpha val="40000"/>
+                  </a:schemeClr>
+                </a:outerShdw>
+              </a:effectLst>
+              <a:latin typeface="Calibri" panose="020F0502020204030204"/>
+            </a:endParaRPr>
           </a:p>
         </p:txBody>
       </p:sp>
@@ -4659,23 +5570,20 @@
           <a:lstStyle/>
           <a:p>
             <a:pPr algn="ctr" defTabSz="685800"/>
-            <a:r>
-              <a:rPr lang="fr-FR" sz="1350" dirty="0">
-                <a:ln w="0"/>
-                <a:solidFill>
-                  <a:schemeClr val="tx1"/>
-                </a:solidFill>
-                <a:effectLst>
-                  <a:outerShdw blurRad="38100" dist="19050" dir="2700000" algn="tl" rotWithShape="0">
-                    <a:schemeClr val="dk1">
-                      <a:alpha val="40000"/>
-                    </a:schemeClr>
-                  </a:outerShdw>
-                </a:effectLst>
-                <a:latin typeface="Calibri" panose="020F0502020204030204"/>
-              </a:rPr>
-              <a:t>25</a:t>
-            </a:r>
+            <a:endParaRPr lang="fr-FR" sz="1350" dirty="0">
+              <a:ln w="0"/>
+              <a:solidFill>
+                <a:schemeClr val="tx1"/>
+              </a:solidFill>
+              <a:effectLst>
+                <a:outerShdw blurRad="38100" dist="19050" dir="2700000" algn="tl" rotWithShape="0">
+                  <a:schemeClr val="dk1">
+                    <a:alpha val="40000"/>
+                  </a:schemeClr>
+                </a:outerShdw>
+              </a:effectLst>
+              <a:latin typeface="Calibri" panose="020F0502020204030204"/>
+            </a:endParaRPr>
           </a:p>
         </p:txBody>
       </p:sp>
@@ -4728,23 +5636,20 @@
           <a:lstStyle/>
           <a:p>
             <a:pPr algn="ctr" defTabSz="685800"/>
-            <a:r>
-              <a:rPr lang="fr-FR" sz="1350" dirty="0">
-                <a:ln w="0"/>
-                <a:solidFill>
-                  <a:schemeClr val="tx1"/>
-                </a:solidFill>
-                <a:effectLst>
-                  <a:outerShdw blurRad="38100" dist="19050" dir="2700000" algn="tl" rotWithShape="0">
-                    <a:schemeClr val="dk1">
-                      <a:alpha val="40000"/>
-                    </a:schemeClr>
-                  </a:outerShdw>
-                </a:effectLst>
-                <a:latin typeface="Calibri" panose="020F0502020204030204"/>
-              </a:rPr>
-              <a:t>26</a:t>
-            </a:r>
+            <a:endParaRPr lang="fr-FR" sz="1350" dirty="0">
+              <a:ln w="0"/>
+              <a:solidFill>
+                <a:schemeClr val="tx1"/>
+              </a:solidFill>
+              <a:effectLst>
+                <a:outerShdw blurRad="38100" dist="19050" dir="2700000" algn="tl" rotWithShape="0">
+                  <a:schemeClr val="dk1">
+                    <a:alpha val="40000"/>
+                  </a:schemeClr>
+                </a:outerShdw>
+              </a:effectLst>
+              <a:latin typeface="Calibri" panose="020F0502020204030204"/>
+            </a:endParaRPr>
           </a:p>
         </p:txBody>
       </p:sp>
@@ -4797,23 +5702,20 @@
           <a:lstStyle/>
           <a:p>
             <a:pPr algn="ctr" defTabSz="685800"/>
-            <a:r>
-              <a:rPr lang="fr-FR" sz="1350" dirty="0">
-                <a:ln w="0"/>
-                <a:solidFill>
-                  <a:schemeClr val="tx1"/>
-                </a:solidFill>
-                <a:effectLst>
-                  <a:outerShdw blurRad="38100" dist="19050" dir="2700000" algn="tl" rotWithShape="0">
-                    <a:schemeClr val="dk1">
-                      <a:alpha val="40000"/>
-                    </a:schemeClr>
-                  </a:outerShdw>
-                </a:effectLst>
-                <a:latin typeface="Calibri" panose="020F0502020204030204"/>
-              </a:rPr>
-              <a:t>27</a:t>
-            </a:r>
+            <a:endParaRPr lang="fr-FR" sz="1350" dirty="0">
+              <a:ln w="0"/>
+              <a:solidFill>
+                <a:schemeClr val="tx1"/>
+              </a:solidFill>
+              <a:effectLst>
+                <a:outerShdw blurRad="38100" dist="19050" dir="2700000" algn="tl" rotWithShape="0">
+                  <a:schemeClr val="dk1">
+                    <a:alpha val="40000"/>
+                  </a:schemeClr>
+                </a:outerShdw>
+              </a:effectLst>
+              <a:latin typeface="Calibri" panose="020F0502020204030204"/>
+            </a:endParaRPr>
           </a:p>
         </p:txBody>
       </p:sp>
@@ -4866,161 +5768,20 @@
           <a:lstStyle/>
           <a:p>
             <a:pPr algn="ctr" defTabSz="685800"/>
-            <a:r>
-              <a:rPr lang="fr-FR" sz="1350" dirty="0">
-                <a:ln w="0"/>
-                <a:solidFill>
-                  <a:schemeClr val="tx1"/>
-                </a:solidFill>
-                <a:effectLst>
-                  <a:outerShdw blurRad="38100" dist="19050" dir="2700000" algn="tl" rotWithShape="0">
-                    <a:schemeClr val="dk1">
-                      <a:alpha val="40000"/>
-                    </a:schemeClr>
-                  </a:outerShdw>
-                </a:effectLst>
-                <a:latin typeface="Calibri" panose="020F0502020204030204"/>
-              </a:rPr>
-              <a:t>28</a:t>
-            </a:r>
-          </a:p>
-        </p:txBody>
-      </p:sp>
-      <p:sp>
-        <p:nvSpPr>
-          <p:cNvPr id="15" name="Rectangle 14">
-            <a:extLst>
-              <a:ext uri="{FF2B5EF4-FFF2-40B4-BE49-F238E27FC236}">
-                <a16:creationId xmlns:a16="http://schemas.microsoft.com/office/drawing/2014/main" id="{DE09D0A8-7AF8-4AAE-9D39-57739BD45F3F}"/>
-              </a:ext>
-            </a:extLst>
-          </p:cNvPr>
-          <p:cNvSpPr/>
-          <p:nvPr/>
-        </p:nvSpPr>
-        <p:spPr>
-          <a:xfrm>
-            <a:off x="6069103" y="3140968"/>
-            <a:ext cx="423569" cy="396000"/>
-          </a:xfrm>
-          <a:prstGeom prst="rect">
-            <a:avLst/>
-          </a:prstGeom>
-          <a:noFill/>
-          <a:ln w="9525"/>
-        </p:spPr>
-        <p:style>
-          <a:lnRef idx="2">
-            <a:schemeClr val="accent1">
-              <a:shade val="50000"/>
-            </a:schemeClr>
-          </a:lnRef>
-          <a:fillRef idx="1">
-            <a:schemeClr val="accent1"/>
-          </a:fillRef>
-          <a:effectRef idx="0">
-            <a:schemeClr val="accent1"/>
-          </a:effectRef>
-          <a:fontRef idx="minor">
-            <a:schemeClr val="lt1"/>
-          </a:fontRef>
-        </p:style>
-        <p:txBody>
-          <a:bodyPr rot="0" spcFirstLastPara="0" vertOverflow="overflow" horzOverflow="overflow" vert="horz" wrap="square" lIns="68580" tIns="34290" rIns="68580" bIns="34290" numCol="1" spcCol="0" rtlCol="0" fromWordArt="0" anchor="ctr" anchorCtr="0" forceAA="0" compatLnSpc="1">
-            <a:prstTxWarp prst="textNoShape">
-              <a:avLst/>
-            </a:prstTxWarp>
-            <a:noAutofit/>
-          </a:bodyPr>
-          <a:lstStyle/>
-          <a:p>
-            <a:pPr algn="ctr" defTabSz="685800"/>
-            <a:r>
-              <a:rPr lang="fr-FR" sz="1350" dirty="0">
-                <a:ln w="0"/>
-                <a:solidFill>
-                  <a:schemeClr val="tx1"/>
-                </a:solidFill>
-                <a:effectLst>
-                  <a:outerShdw blurRad="38100" dist="19050" dir="2700000" algn="tl" rotWithShape="0">
-                    <a:schemeClr val="dk1">
-                      <a:alpha val="40000"/>
-                    </a:schemeClr>
-                  </a:outerShdw>
-                </a:effectLst>
-                <a:latin typeface="Calibri" panose="020F0502020204030204"/>
-              </a:rPr>
-              <a:t>29</a:t>
-            </a:r>
-          </a:p>
-        </p:txBody>
-      </p:sp>
-      <p:sp>
-        <p:nvSpPr>
-          <p:cNvPr id="16" name="Rectangle 15">
-            <a:extLst>
-              <a:ext uri="{FF2B5EF4-FFF2-40B4-BE49-F238E27FC236}">
-                <a16:creationId xmlns:a16="http://schemas.microsoft.com/office/drawing/2014/main" id="{170A2E4D-AC5C-4E21-90B1-884EBD2FD0BA}"/>
-              </a:ext>
-            </a:extLst>
-          </p:cNvPr>
-          <p:cNvSpPr/>
-          <p:nvPr/>
-        </p:nvSpPr>
-        <p:spPr>
-          <a:xfrm>
-            <a:off x="6494567" y="3140968"/>
-            <a:ext cx="423569" cy="396000"/>
-          </a:xfrm>
-          <a:prstGeom prst="rect">
-            <a:avLst/>
-          </a:prstGeom>
-          <a:noFill/>
-          <a:ln w="9525"/>
-        </p:spPr>
-        <p:style>
-          <a:lnRef idx="2">
-            <a:schemeClr val="accent1">
-              <a:shade val="50000"/>
-            </a:schemeClr>
-          </a:lnRef>
-          <a:fillRef idx="1">
-            <a:schemeClr val="accent1"/>
-          </a:fillRef>
-          <a:effectRef idx="0">
-            <a:schemeClr val="accent1"/>
-          </a:effectRef>
-          <a:fontRef idx="minor">
-            <a:schemeClr val="lt1"/>
-          </a:fontRef>
-        </p:style>
-        <p:txBody>
-          <a:bodyPr rot="0" spcFirstLastPara="0" vertOverflow="overflow" horzOverflow="overflow" vert="horz" wrap="square" lIns="68580" tIns="34290" rIns="68580" bIns="34290" numCol="1" spcCol="0" rtlCol="0" fromWordArt="0" anchor="ctr" anchorCtr="0" forceAA="0" compatLnSpc="1">
-            <a:prstTxWarp prst="textNoShape">
-              <a:avLst/>
-            </a:prstTxWarp>
-            <a:noAutofit/>
-          </a:bodyPr>
-          <a:lstStyle/>
-          <a:p>
-            <a:pPr algn="ctr" defTabSz="685800"/>
-            <a:r>
-              <a:rPr lang="fr-FR" sz="1350" dirty="0">
-                <a:ln w="0"/>
-                <a:solidFill>
-                  <a:schemeClr val="tx1"/>
-                </a:solidFill>
-                <a:effectLst>
-                  <a:outerShdw blurRad="38100" dist="19050" dir="2700000" algn="tl" rotWithShape="0">
-                    <a:schemeClr val="dk1">
-                      <a:alpha val="40000"/>
-                    </a:schemeClr>
-                  </a:outerShdw>
-                </a:effectLst>
-                <a:latin typeface="Calibri" panose="020F0502020204030204"/>
-              </a:rPr>
-              <a:t>30</a:t>
-            </a:r>
+            <a:endParaRPr lang="fr-FR" sz="1350" dirty="0">
+              <a:ln w="0"/>
+              <a:solidFill>
+                <a:schemeClr val="tx1"/>
+              </a:solidFill>
+              <a:effectLst>
+                <a:outerShdw blurRad="38100" dist="19050" dir="2700000" algn="tl" rotWithShape="0">
+                  <a:schemeClr val="dk1">
+                    <a:alpha val="40000"/>
+                  </a:schemeClr>
+                </a:outerShdw>
+              </a:effectLst>
+              <a:latin typeface="Calibri" panose="020F0502020204030204"/>
+            </a:endParaRPr>
           </a:p>
         </p:txBody>
       </p:sp>
@@ -5038,14 +5799,16 @@
         </p:nvSpPr>
         <p:spPr>
           <a:xfrm>
-            <a:off x="7028751" y="3153829"/>
+            <a:off x="6069200" y="3140968"/>
             <a:ext cx="423569" cy="396000"/>
           </a:xfrm>
           <a:prstGeom prst="rect">
             <a:avLst/>
           </a:prstGeom>
-          <a:noFill/>
-          <a:ln w="28575"/>
+          <a:solidFill>
+            <a:schemeClr val="bg1"/>
+          </a:solidFill>
+          <a:ln w="12700"/>
         </p:spPr>
         <p:style>
           <a:lnRef idx="2">
@@ -5093,12 +5856,415 @@
           </a:p>
         </p:txBody>
       </p:sp>
+      <p:graphicFrame>
+        <p:nvGraphicFramePr>
+          <p:cNvPr id="24" name="Tableau 23">
+            <a:extLst>
+              <a:ext uri="{FF2B5EF4-FFF2-40B4-BE49-F238E27FC236}">
+                <a16:creationId xmlns:a16="http://schemas.microsoft.com/office/drawing/2014/main" id="{12991DCD-7D4A-42C6-8EDC-217282191FE5}"/>
+              </a:ext>
+            </a:extLst>
+          </p:cNvPr>
+          <p:cNvGraphicFramePr>
+            <a:graphicFrameLocks noGrp="1"/>
+          </p:cNvGraphicFramePr>
+          <p:nvPr>
+            <p:extLst>
+              <p:ext uri="{D42A27DB-BD31-4B8C-83A1-F6EECF244321}">
+                <p14:modId xmlns:p14="http://schemas.microsoft.com/office/powerpoint/2010/main" val="2039644196"/>
+              </p:ext>
+            </p:extLst>
+          </p:nvPr>
+        </p:nvGraphicFramePr>
+        <p:xfrm>
+          <a:off x="7452320" y="1602091"/>
+          <a:ext cx="787400" cy="2225040"/>
+        </p:xfrm>
+        <a:graphic>
+          <a:graphicData uri="http://schemas.openxmlformats.org/drawingml/2006/table">
+            <a:tbl>
+              <a:tblPr>
+                <a:tableStyleId>{5C22544A-7EE6-4342-B048-85BDC9FD1C3A}</a:tableStyleId>
+              </a:tblPr>
+              <a:tblGrid>
+                <a:gridCol w="787400">
+                  <a:extLst>
+                    <a:ext uri="{9D8B030D-6E8A-4147-A177-3AD203B41FA5}">
+                      <a16:colId xmlns:a16="http://schemas.microsoft.com/office/drawing/2014/main" val="3944659274"/>
+                    </a:ext>
+                  </a:extLst>
+                </a:gridCol>
+              </a:tblGrid>
+              <a:tr h="185420">
+                <a:tc>
+                  <a:txBody>
+                    <a:bodyPr/>
+                    <a:lstStyle/>
+                    <a:p>
+                      <a:pPr algn="r" fontAlgn="b"/>
+                      <a:r>
+                        <a:rPr lang="fr-FR" sz="1100" u="none" strike="noStrike">
+                          <a:effectLst/>
+                        </a:rPr>
+                        <a:t>0.05</a:t>
+                      </a:r>
+                      <a:endParaRPr lang="fr-FR" sz="1100" b="0" i="0" u="none" strike="noStrike">
+                        <a:solidFill>
+                          <a:srgbClr val="000000"/>
+                        </a:solidFill>
+                        <a:effectLst/>
+                        <a:latin typeface="Calibri" panose="020F0502020204030204" pitchFamily="34" charset="0"/>
+                      </a:endParaRPr>
+                    </a:p>
+                  </a:txBody>
+                  <a:tcPr marL="5443" marR="5443" marT="5443" marB="0" anchor="b"/>
+                </a:tc>
+                <a:extLst>
+                  <a:ext uri="{0D108BD9-81ED-4DB2-BD59-A6C34878D82A}">
+                    <a16:rowId xmlns:a16="http://schemas.microsoft.com/office/drawing/2014/main" val="1291776472"/>
+                  </a:ext>
+                </a:extLst>
+              </a:tr>
+              <a:tr h="185420">
+                <a:tc>
+                  <a:txBody>
+                    <a:bodyPr/>
+                    <a:lstStyle/>
+                    <a:p>
+                      <a:pPr algn="r" fontAlgn="b"/>
+                      <a:r>
+                        <a:rPr lang="fr-FR" sz="1100" u="none" strike="noStrike">
+                          <a:effectLst/>
+                        </a:rPr>
+                        <a:t>0.08</a:t>
+                      </a:r>
+                      <a:endParaRPr lang="fr-FR" sz="1100" b="0" i="0" u="none" strike="noStrike">
+                        <a:solidFill>
+                          <a:srgbClr val="000000"/>
+                        </a:solidFill>
+                        <a:effectLst/>
+                        <a:latin typeface="Calibri" panose="020F0502020204030204" pitchFamily="34" charset="0"/>
+                      </a:endParaRPr>
+                    </a:p>
+                  </a:txBody>
+                  <a:tcPr marL="5443" marR="5443" marT="5443" marB="0" anchor="b"/>
+                </a:tc>
+                <a:extLst>
+                  <a:ext uri="{0D108BD9-81ED-4DB2-BD59-A6C34878D82A}">
+                    <a16:rowId xmlns:a16="http://schemas.microsoft.com/office/drawing/2014/main" val="1843928839"/>
+                  </a:ext>
+                </a:extLst>
+              </a:tr>
+              <a:tr h="185420">
+                <a:tc>
+                  <a:txBody>
+                    <a:bodyPr/>
+                    <a:lstStyle/>
+                    <a:p>
+                      <a:pPr algn="r" fontAlgn="b"/>
+                      <a:r>
+                        <a:rPr lang="fr-FR" sz="1100" u="none" strike="noStrike">
+                          <a:effectLst/>
+                        </a:rPr>
+                        <a:t>0.11</a:t>
+                      </a:r>
+                      <a:endParaRPr lang="fr-FR" sz="1100" b="0" i="0" u="none" strike="noStrike">
+                        <a:solidFill>
+                          <a:srgbClr val="000000"/>
+                        </a:solidFill>
+                        <a:effectLst/>
+                        <a:latin typeface="Calibri" panose="020F0502020204030204" pitchFamily="34" charset="0"/>
+                      </a:endParaRPr>
+                    </a:p>
+                  </a:txBody>
+                  <a:tcPr marL="5443" marR="5443" marT="5443" marB="0" anchor="b"/>
+                </a:tc>
+                <a:extLst>
+                  <a:ext uri="{0D108BD9-81ED-4DB2-BD59-A6C34878D82A}">
+                    <a16:rowId xmlns:a16="http://schemas.microsoft.com/office/drawing/2014/main" val="401176023"/>
+                  </a:ext>
+                </a:extLst>
+              </a:tr>
+              <a:tr h="185420">
+                <a:tc>
+                  <a:txBody>
+                    <a:bodyPr/>
+                    <a:lstStyle/>
+                    <a:p>
+                      <a:pPr algn="r" fontAlgn="b"/>
+                      <a:r>
+                        <a:rPr lang="fr-FR" sz="1100" u="none" strike="noStrike">
+                          <a:effectLst/>
+                        </a:rPr>
+                        <a:t>0.15</a:t>
+                      </a:r>
+                      <a:endParaRPr lang="fr-FR" sz="1100" b="0" i="0" u="none" strike="noStrike">
+                        <a:solidFill>
+                          <a:srgbClr val="000000"/>
+                        </a:solidFill>
+                        <a:effectLst/>
+                        <a:latin typeface="Calibri" panose="020F0502020204030204" pitchFamily="34" charset="0"/>
+                      </a:endParaRPr>
+                    </a:p>
+                  </a:txBody>
+                  <a:tcPr marL="5443" marR="5443" marT="5443" marB="0" anchor="b"/>
+                </a:tc>
+                <a:extLst>
+                  <a:ext uri="{0D108BD9-81ED-4DB2-BD59-A6C34878D82A}">
+                    <a16:rowId xmlns:a16="http://schemas.microsoft.com/office/drawing/2014/main" val="3626043403"/>
+                  </a:ext>
+                </a:extLst>
+              </a:tr>
+              <a:tr h="185420">
+                <a:tc>
+                  <a:txBody>
+                    <a:bodyPr/>
+                    <a:lstStyle/>
+                    <a:p>
+                      <a:pPr algn="r" fontAlgn="b"/>
+                      <a:r>
+                        <a:rPr lang="fr-FR" sz="1100" u="none" strike="noStrike">
+                          <a:effectLst/>
+                        </a:rPr>
+                        <a:t>0.18</a:t>
+                      </a:r>
+                      <a:endParaRPr lang="fr-FR" sz="1100" b="0" i="0" u="none" strike="noStrike">
+                        <a:solidFill>
+                          <a:srgbClr val="000000"/>
+                        </a:solidFill>
+                        <a:effectLst/>
+                        <a:latin typeface="Calibri" panose="020F0502020204030204" pitchFamily="34" charset="0"/>
+                      </a:endParaRPr>
+                    </a:p>
+                  </a:txBody>
+                  <a:tcPr marL="5443" marR="5443" marT="5443" marB="0" anchor="b"/>
+                </a:tc>
+                <a:extLst>
+                  <a:ext uri="{0D108BD9-81ED-4DB2-BD59-A6C34878D82A}">
+                    <a16:rowId xmlns:a16="http://schemas.microsoft.com/office/drawing/2014/main" val="1873723827"/>
+                  </a:ext>
+                </a:extLst>
+              </a:tr>
+              <a:tr h="185420">
+                <a:tc>
+                  <a:txBody>
+                    <a:bodyPr/>
+                    <a:lstStyle/>
+                    <a:p>
+                      <a:pPr algn="r" fontAlgn="b"/>
+                      <a:r>
+                        <a:rPr lang="fr-FR" sz="1100" u="none" strike="noStrike">
+                          <a:effectLst/>
+                        </a:rPr>
+                        <a:t>0.21</a:t>
+                      </a:r>
+                      <a:endParaRPr lang="fr-FR" sz="1100" b="0" i="0" u="none" strike="noStrike">
+                        <a:solidFill>
+                          <a:srgbClr val="000000"/>
+                        </a:solidFill>
+                        <a:effectLst/>
+                        <a:latin typeface="Calibri" panose="020F0502020204030204" pitchFamily="34" charset="0"/>
+                      </a:endParaRPr>
+                    </a:p>
+                  </a:txBody>
+                  <a:tcPr marL="5443" marR="5443" marT="5443" marB="0" anchor="b"/>
+                </a:tc>
+                <a:extLst>
+                  <a:ext uri="{0D108BD9-81ED-4DB2-BD59-A6C34878D82A}">
+                    <a16:rowId xmlns:a16="http://schemas.microsoft.com/office/drawing/2014/main" val="1391634024"/>
+                  </a:ext>
+                </a:extLst>
+              </a:tr>
+              <a:tr h="185420">
+                <a:tc>
+                  <a:txBody>
+                    <a:bodyPr/>
+                    <a:lstStyle/>
+                    <a:p>
+                      <a:pPr algn="r" fontAlgn="b"/>
+                      <a:r>
+                        <a:rPr lang="fr-FR" sz="1100" u="none" strike="noStrike">
+                          <a:effectLst/>
+                        </a:rPr>
+                        <a:t>0.24</a:t>
+                      </a:r>
+                      <a:endParaRPr lang="fr-FR" sz="1100" b="0" i="0" u="none" strike="noStrike">
+                        <a:solidFill>
+                          <a:srgbClr val="000000"/>
+                        </a:solidFill>
+                        <a:effectLst/>
+                        <a:latin typeface="Calibri" panose="020F0502020204030204" pitchFamily="34" charset="0"/>
+                      </a:endParaRPr>
+                    </a:p>
+                  </a:txBody>
+                  <a:tcPr marL="5443" marR="5443" marT="5443" marB="0" anchor="b"/>
+                </a:tc>
+                <a:extLst>
+                  <a:ext uri="{0D108BD9-81ED-4DB2-BD59-A6C34878D82A}">
+                    <a16:rowId xmlns:a16="http://schemas.microsoft.com/office/drawing/2014/main" val="1476779360"/>
+                  </a:ext>
+                </a:extLst>
+              </a:tr>
+              <a:tr h="185420">
+                <a:tc>
+                  <a:txBody>
+                    <a:bodyPr/>
+                    <a:lstStyle/>
+                    <a:p>
+                      <a:pPr algn="r" fontAlgn="b"/>
+                      <a:r>
+                        <a:rPr lang="fr-FR" sz="1100" u="none" strike="noStrike">
+                          <a:effectLst/>
+                        </a:rPr>
+                        <a:t>0.28</a:t>
+                      </a:r>
+                      <a:endParaRPr lang="fr-FR" sz="1100" b="0" i="0" u="none" strike="noStrike">
+                        <a:solidFill>
+                          <a:srgbClr val="000000"/>
+                        </a:solidFill>
+                        <a:effectLst/>
+                        <a:latin typeface="Calibri" panose="020F0502020204030204" pitchFamily="34" charset="0"/>
+                      </a:endParaRPr>
+                    </a:p>
+                  </a:txBody>
+                  <a:tcPr marL="5443" marR="5443" marT="5443" marB="0" anchor="b"/>
+                </a:tc>
+                <a:extLst>
+                  <a:ext uri="{0D108BD9-81ED-4DB2-BD59-A6C34878D82A}">
+                    <a16:rowId xmlns:a16="http://schemas.microsoft.com/office/drawing/2014/main" val="1992005096"/>
+                  </a:ext>
+                </a:extLst>
+              </a:tr>
+              <a:tr h="185420">
+                <a:tc>
+                  <a:txBody>
+                    <a:bodyPr/>
+                    <a:lstStyle/>
+                    <a:p>
+                      <a:pPr algn="r" fontAlgn="b"/>
+                      <a:r>
+                        <a:rPr lang="fr-FR" sz="1100" u="none" strike="noStrike" dirty="0">
+                          <a:effectLst/>
+                        </a:rPr>
+                        <a:t>0.31</a:t>
+                      </a:r>
+                      <a:endParaRPr lang="fr-FR" sz="1100" b="0" i="0" u="none" strike="noStrike" dirty="0">
+                        <a:solidFill>
+                          <a:srgbClr val="000000"/>
+                        </a:solidFill>
+                        <a:effectLst/>
+                        <a:latin typeface="Calibri" panose="020F0502020204030204" pitchFamily="34" charset="0"/>
+                      </a:endParaRPr>
+                    </a:p>
+                  </a:txBody>
+                  <a:tcPr marL="5443" marR="5443" marT="5443" marB="0" anchor="b"/>
+                </a:tc>
+                <a:extLst>
+                  <a:ext uri="{0D108BD9-81ED-4DB2-BD59-A6C34878D82A}">
+                    <a16:rowId xmlns:a16="http://schemas.microsoft.com/office/drawing/2014/main" val="3675884917"/>
+                  </a:ext>
+                </a:extLst>
+              </a:tr>
+              <a:tr h="185420">
+                <a:tc>
+                  <a:txBody>
+                    <a:bodyPr/>
+                    <a:lstStyle/>
+                    <a:p>
+                      <a:pPr algn="r" fontAlgn="b"/>
+                      <a:r>
+                        <a:rPr lang="fr-FR" sz="1100" u="none" strike="noStrike">
+                          <a:effectLst/>
+                        </a:rPr>
+                        <a:t>0.34</a:t>
+                      </a:r>
+                      <a:endParaRPr lang="fr-FR" sz="1100" b="0" i="0" u="none" strike="noStrike">
+                        <a:solidFill>
+                          <a:srgbClr val="000000"/>
+                        </a:solidFill>
+                        <a:effectLst/>
+                        <a:latin typeface="Calibri" panose="020F0502020204030204" pitchFamily="34" charset="0"/>
+                      </a:endParaRPr>
+                    </a:p>
+                  </a:txBody>
+                  <a:tcPr marL="5443" marR="5443" marT="5443" marB="0" anchor="b"/>
+                </a:tc>
+                <a:extLst>
+                  <a:ext uri="{0D108BD9-81ED-4DB2-BD59-A6C34878D82A}">
+                    <a16:rowId xmlns:a16="http://schemas.microsoft.com/office/drawing/2014/main" val="3931455821"/>
+                  </a:ext>
+                </a:extLst>
+              </a:tr>
+              <a:tr h="185420">
+                <a:tc>
+                  <a:txBody>
+                    <a:bodyPr/>
+                    <a:lstStyle/>
+                    <a:p>
+                      <a:pPr algn="r" fontAlgn="b"/>
+                      <a:r>
+                        <a:rPr lang="fr-FR" sz="1100" u="none" strike="noStrike">
+                          <a:effectLst/>
+                        </a:rPr>
+                        <a:t>0.37</a:t>
+                      </a:r>
+                      <a:endParaRPr lang="fr-FR" sz="1100" b="0" i="0" u="none" strike="noStrike">
+                        <a:solidFill>
+                          <a:srgbClr val="000000"/>
+                        </a:solidFill>
+                        <a:effectLst/>
+                        <a:latin typeface="Calibri" panose="020F0502020204030204" pitchFamily="34" charset="0"/>
+                      </a:endParaRPr>
+                    </a:p>
+                  </a:txBody>
+                  <a:tcPr marL="5443" marR="5443" marT="5443" marB="0" anchor="b"/>
+                </a:tc>
+                <a:extLst>
+                  <a:ext uri="{0D108BD9-81ED-4DB2-BD59-A6C34878D82A}">
+                    <a16:rowId xmlns:a16="http://schemas.microsoft.com/office/drawing/2014/main" val="4067371140"/>
+                  </a:ext>
+                </a:extLst>
+              </a:tr>
+              <a:tr h="185420">
+                <a:tc>
+                  <a:txBody>
+                    <a:bodyPr/>
+                    <a:lstStyle/>
+                    <a:p>
+                      <a:pPr algn="r" fontAlgn="b"/>
+                      <a:r>
+                        <a:rPr lang="fr-FR" sz="1100" u="none" strike="noStrike" dirty="0">
+                          <a:effectLst/>
+                        </a:rPr>
+                        <a:t>0.40</a:t>
+                      </a:r>
+                      <a:endParaRPr lang="fr-FR" sz="1100" b="0" i="0" u="none" strike="noStrike" dirty="0">
+                        <a:solidFill>
+                          <a:srgbClr val="000000"/>
+                        </a:solidFill>
+                        <a:effectLst/>
+                        <a:latin typeface="Calibri" panose="020F0502020204030204" pitchFamily="34" charset="0"/>
+                      </a:endParaRPr>
+                    </a:p>
+                  </a:txBody>
+                  <a:tcPr marL="5443" marR="5443" marT="5443" marB="0" anchor="b"/>
+                </a:tc>
+                <a:extLst>
+                  <a:ext uri="{0D108BD9-81ED-4DB2-BD59-A6C34878D82A}">
+                    <a16:rowId xmlns:a16="http://schemas.microsoft.com/office/drawing/2014/main" val="1901984566"/>
+                  </a:ext>
+                </a:extLst>
+              </a:tr>
+            </a:tbl>
+          </a:graphicData>
+        </a:graphic>
+      </p:graphicFrame>
       <p:pic>
         <p:nvPicPr>
-          <p:cNvPr id="44" name="Image 43">
+          <p:cNvPr id="73" name="Image 72">
             <a:extLst>
               <a:ext uri="{FF2B5EF4-FFF2-40B4-BE49-F238E27FC236}">
-                <a16:creationId xmlns:a16="http://schemas.microsoft.com/office/drawing/2014/main" id="{6AF52CA8-5FDC-4E5B-8187-611351F692C5}"/>
+                <a16:creationId xmlns:a16="http://schemas.microsoft.com/office/drawing/2014/main" id="{502BC901-48A4-4596-98A9-EBBF576367FA}"/>
               </a:ext>
             </a:extLst>
           </p:cNvPr>
@@ -5108,25 +6274,146 @@
           <p:nvPr/>
         </p:nvPicPr>
         <p:blipFill>
-          <a:blip r:embed="rId2"/>
+          <a:blip r:embed="rId3">
+            <a:clrChange>
+              <a:clrFrom>
+                <a:srgbClr val="D99694"/>
+              </a:clrFrom>
+              <a:clrTo>
+                <a:srgbClr val="D99694">
+                  <a:alpha val="0"/>
+                </a:srgbClr>
+              </a:clrTo>
+            </a:clrChange>
+          </a:blip>
           <a:stretch>
             <a:fillRect/>
           </a:stretch>
         </p:blipFill>
         <p:spPr>
           <a:xfrm>
-            <a:off x="611560" y="4365104"/>
-            <a:ext cx="7584081" cy="847417"/>
+            <a:off x="1043608" y="4655867"/>
+            <a:ext cx="6316003" cy="999831"/>
           </a:xfrm>
           <a:prstGeom prst="rect">
             <a:avLst/>
           </a:prstGeom>
         </p:spPr>
       </p:pic>
+      <p:sp>
+        <p:nvSpPr>
+          <p:cNvPr id="75" name="ZoneTexte 74">
+            <a:extLst>
+              <a:ext uri="{FF2B5EF4-FFF2-40B4-BE49-F238E27FC236}">
+                <a16:creationId xmlns:a16="http://schemas.microsoft.com/office/drawing/2014/main" id="{D2489010-9223-4DBF-B928-DC11FE6B900A}"/>
+              </a:ext>
+            </a:extLst>
+          </p:cNvPr>
+          <p:cNvSpPr txBox="1"/>
+          <p:nvPr/>
+        </p:nvSpPr>
+        <p:spPr>
+          <a:xfrm>
+            <a:off x="726407" y="1323091"/>
+            <a:ext cx="1095107" cy="451662"/>
+          </a:xfrm>
+          <a:prstGeom prst="rect">
+            <a:avLst/>
+          </a:prstGeom>
+          <a:noFill/>
+        </p:spPr>
+        <p:txBody>
+          <a:bodyPr wrap="none" rtlCol="0">
+            <a:spAutoFit/>
+          </a:bodyPr>
+          <a:lstStyle>
+            <a:defPPr>
+              <a:defRPr lang="fr-FR"/>
+            </a:defPPr>
+            <a:lvl1pPr>
+              <a:defRPr sz="1500">
+                <a:solidFill>
+                  <a:srgbClr val="4A7EBB"/>
+                </a:solidFill>
+              </a:defRPr>
+            </a:lvl1pPr>
+          </a:lstStyle>
+          <a:p>
+            <a:pPr algn="ctr">
+              <a:lnSpc>
+                <a:spcPts val="1400"/>
+              </a:lnSpc>
+            </a:pPr>
+            <a:r>
+              <a:rPr lang="fr-FR" sz="2000" baseline="30000" dirty="0"/>
+              <a:t>Population</a:t>
+            </a:r>
+            <a:br>
+              <a:rPr lang="fr-FR" sz="2000" baseline="30000" dirty="0"/>
+            </a:br>
+            <a:r>
+              <a:rPr lang="fr-FR" sz="2000" baseline="30000" dirty="0"/>
+              <a:t>planctonique</a:t>
+            </a:r>
+          </a:p>
+        </p:txBody>
+      </p:sp>
+      <p:sp>
+        <p:nvSpPr>
+          <p:cNvPr id="76" name="Ellipse 75">
+            <a:extLst>
+              <a:ext uri="{FF2B5EF4-FFF2-40B4-BE49-F238E27FC236}">
+                <a16:creationId xmlns:a16="http://schemas.microsoft.com/office/drawing/2014/main" id="{C8D04C2F-6005-4D3A-8242-D2012F378394}"/>
+              </a:ext>
+            </a:extLst>
+          </p:cNvPr>
+          <p:cNvSpPr/>
+          <p:nvPr/>
+        </p:nvSpPr>
+        <p:spPr>
+          <a:xfrm>
+            <a:off x="539552" y="1355334"/>
+            <a:ext cx="190434" cy="190434"/>
+          </a:xfrm>
+          <a:prstGeom prst="ellipse">
+            <a:avLst/>
+          </a:prstGeom>
+          <a:solidFill>
+            <a:srgbClr val="006600"/>
+          </a:solidFill>
+          <a:ln>
+            <a:noFill/>
+          </a:ln>
+        </p:spPr>
+        <p:style>
+          <a:lnRef idx="2">
+            <a:schemeClr val="accent1">
+              <a:shade val="50000"/>
+            </a:schemeClr>
+          </a:lnRef>
+          <a:fillRef idx="1">
+            <a:schemeClr val="accent1"/>
+          </a:fillRef>
+          <a:effectRef idx="0">
+            <a:schemeClr val="accent1"/>
+          </a:effectRef>
+          <a:fontRef idx="minor">
+            <a:schemeClr val="lt1"/>
+          </a:fontRef>
+        </p:style>
+        <p:txBody>
+          <a:bodyPr rtlCol="0" anchor="ctr"/>
+          <a:lstStyle/>
+          <a:p>
+            <a:pPr algn="ctr"/>
+            <a:endParaRPr lang="fr-FR"/>
+          </a:p>
+        </p:txBody>
+      </p:sp>
     </p:spTree>
     <p:extLst>
       <p:ext uri="{BB962C8B-B14F-4D97-AF65-F5344CB8AC3E}">
-        <p14:creationId xmlns:p14="http://schemas.microsoft.com/office/powerpoint/2010/main" val="99111470"/>
+        <p14:creationId xmlns:p14="http://schemas.microsoft.com/office/powerpoint/2010/main" val="1855021178"/>
       </p:ext>
     </p:extLst>
   </p:cSld>
@@ -5257,8 +6544,8 @@
         </p:blipFill>
         <p:spPr>
           <a:xfrm>
-            <a:off x="166956" y="110791"/>
-            <a:ext cx="788210" cy="860412"/>
+            <a:off x="117004" y="127957"/>
+            <a:ext cx="802159" cy="875639"/>
           </a:xfrm>
           <a:prstGeom prst="rect">
             <a:avLst/>
@@ -5359,10 +6646,10 @@
       </p:sp>
       <p:pic>
         <p:nvPicPr>
-          <p:cNvPr id="7" name="Image 6">
+          <p:cNvPr id="9" name="Image 8">
             <a:extLst>
               <a:ext uri="{FF2B5EF4-FFF2-40B4-BE49-F238E27FC236}">
-                <a16:creationId xmlns:a16="http://schemas.microsoft.com/office/drawing/2014/main" id="{89300997-9F17-4992-BB0D-FDAFD1F1C6F3}"/>
+                <a16:creationId xmlns:a16="http://schemas.microsoft.com/office/drawing/2014/main" id="{67D87294-2A6D-4779-82B5-98EA5433C244}"/>
               </a:ext>
             </a:extLst>
           </p:cNvPr>
@@ -5379,8 +6666,269 @@
         </p:blipFill>
         <p:spPr>
           <a:xfrm>
-            <a:off x="2388519" y="89436"/>
-            <a:ext cx="5999905" cy="670407"/>
+            <a:off x="7740352" y="152933"/>
+            <a:ext cx="643336" cy="674374"/>
+          </a:xfrm>
+          <a:prstGeom prst="rect">
+            <a:avLst/>
+          </a:prstGeom>
+          <a:ln>
+            <a:noFill/>
+          </a:ln>
+          <a:effectLst/>
+          <a:scene3d>
+            <a:camera prst="orthographicFront">
+              <a:rot lat="0" lon="0" rev="0"/>
+            </a:camera>
+            <a:lightRig rig="balanced" dir="t">
+              <a:rot lat="0" lon="0" rev="8700000"/>
+            </a:lightRig>
+          </a:scene3d>
+          <a:sp3d>
+            <a:bevelT w="190500" h="38100"/>
+          </a:sp3d>
+        </p:spPr>
+      </p:pic>
+      <p:pic>
+        <p:nvPicPr>
+          <p:cNvPr id="50" name="Image 49">
+            <a:extLst>
+              <a:ext uri="{FF2B5EF4-FFF2-40B4-BE49-F238E27FC236}">
+                <a16:creationId xmlns:a16="http://schemas.microsoft.com/office/drawing/2014/main" id="{D330A014-268F-4590-83F2-47719071F04C}"/>
+              </a:ext>
+            </a:extLst>
+          </p:cNvPr>
+          <p:cNvPicPr>
+            <a:picLocks noChangeAspect="1"/>
+          </p:cNvPicPr>
+          <p:nvPr/>
+        </p:nvPicPr>
+        <p:blipFill rotWithShape="1">
+          <a:blip r:embed="rId5">
+            <a:clrChange>
+              <a:clrFrom>
+                <a:srgbClr val="CCCCCC"/>
+              </a:clrFrom>
+              <a:clrTo>
+                <a:srgbClr val="CCCCCC">
+                  <a:alpha val="0"/>
+                </a:srgbClr>
+              </a:clrTo>
+            </a:clrChange>
+            <a:extLst>
+              <a:ext uri="{BEBA8EAE-BF5A-486C-A8C5-ECC9F3942E4B}">
+                <a14:imgProps xmlns:a14="http://schemas.microsoft.com/office/drawing/2010/main">
+                  <a14:imgLayer r:embed="rId6">
+                    <a14:imgEffect>
+                      <a14:brightnessContrast bright="-20000" contrast="40000"/>
+                    </a14:imgEffect>
+                  </a14:imgLayer>
+                </a14:imgProps>
+              </a:ext>
+              <a:ext uri="{28A0092B-C50C-407E-A947-70E740481C1C}">
+                <a14:useLocalDpi xmlns:a14="http://schemas.microsoft.com/office/drawing/2010/main" val="0"/>
+              </a:ext>
+            </a:extLst>
+          </a:blip>
+          <a:srcRect l="13684" t="7435" r="58870" b="88910"/>
+          <a:stretch/>
+        </p:blipFill>
+        <p:spPr>
+          <a:xfrm>
+            <a:off x="5950768" y="5995392"/>
+            <a:ext cx="2509664" cy="241919"/>
+          </a:xfrm>
+          <a:prstGeom prst="rect">
+            <a:avLst/>
+          </a:prstGeom>
+        </p:spPr>
+      </p:pic>
+      <p:sp>
+        <p:nvSpPr>
+          <p:cNvPr id="51" name="Rectangle 50">
+            <a:extLst>
+              <a:ext uri="{FF2B5EF4-FFF2-40B4-BE49-F238E27FC236}">
+                <a16:creationId xmlns:a16="http://schemas.microsoft.com/office/drawing/2014/main" id="{0B64ECA1-22DD-47FC-A783-1367E77DB02F}"/>
+              </a:ext>
+            </a:extLst>
+          </p:cNvPr>
+          <p:cNvSpPr/>
+          <p:nvPr/>
+        </p:nvSpPr>
+        <p:spPr>
+          <a:xfrm>
+            <a:off x="1259632" y="120317"/>
+            <a:ext cx="1440160" cy="740778"/>
+          </a:xfrm>
+          <a:prstGeom prst="rect">
+            <a:avLst/>
+          </a:prstGeom>
+          <a:solidFill>
+            <a:srgbClr val="CCCCCC"/>
+          </a:solidFill>
+          <a:ln>
+            <a:noFill/>
+          </a:ln>
+        </p:spPr>
+        <p:style>
+          <a:lnRef idx="2">
+            <a:schemeClr val="accent1">
+              <a:shade val="50000"/>
+            </a:schemeClr>
+          </a:lnRef>
+          <a:fillRef idx="1">
+            <a:schemeClr val="accent1"/>
+          </a:fillRef>
+          <a:effectRef idx="0">
+            <a:schemeClr val="accent1"/>
+          </a:effectRef>
+          <a:fontRef idx="minor">
+            <a:schemeClr val="lt1"/>
+          </a:fontRef>
+        </p:style>
+        <p:txBody>
+          <a:bodyPr rtlCol="0" anchor="ctr"/>
+          <a:lstStyle/>
+          <a:p>
+            <a:pPr algn="ctr"/>
+            <a:endParaRPr lang="fr-FR"/>
+          </a:p>
+        </p:txBody>
+      </p:sp>
+      <p:sp>
+        <p:nvSpPr>
+          <p:cNvPr id="52" name="ZoneTexte 51">
+            <a:extLst>
+              <a:ext uri="{FF2B5EF4-FFF2-40B4-BE49-F238E27FC236}">
+                <a16:creationId xmlns:a16="http://schemas.microsoft.com/office/drawing/2014/main" id="{DE28EF77-5F37-40C1-8E1A-37677F572EFE}"/>
+              </a:ext>
+            </a:extLst>
+          </p:cNvPr>
+          <p:cNvSpPr txBox="1"/>
+          <p:nvPr/>
+        </p:nvSpPr>
+        <p:spPr>
+          <a:xfrm>
+            <a:off x="1308976" y="516437"/>
+            <a:ext cx="1095107" cy="451662"/>
+          </a:xfrm>
+          <a:prstGeom prst="rect">
+            <a:avLst/>
+          </a:prstGeom>
+          <a:noFill/>
+        </p:spPr>
+        <p:txBody>
+          <a:bodyPr wrap="none" rtlCol="0">
+            <a:spAutoFit/>
+          </a:bodyPr>
+          <a:lstStyle>
+            <a:defPPr>
+              <a:defRPr lang="fr-FR"/>
+            </a:defPPr>
+            <a:lvl1pPr>
+              <a:defRPr sz="1500">
+                <a:solidFill>
+                  <a:srgbClr val="4A7EBB"/>
+                </a:solidFill>
+              </a:defRPr>
+            </a:lvl1pPr>
+          </a:lstStyle>
+          <a:p>
+            <a:pPr algn="ctr">
+              <a:lnSpc>
+                <a:spcPts val="1400"/>
+              </a:lnSpc>
+            </a:pPr>
+            <a:r>
+              <a:rPr lang="fr-FR" sz="2000" baseline="30000" dirty="0"/>
+              <a:t>Population</a:t>
+            </a:r>
+            <a:br>
+              <a:rPr lang="fr-FR" sz="2000" baseline="30000" dirty="0"/>
+            </a:br>
+            <a:r>
+              <a:rPr lang="fr-FR" sz="2000" baseline="30000" dirty="0"/>
+              <a:t>planctonique</a:t>
+            </a:r>
+          </a:p>
+        </p:txBody>
+      </p:sp>
+      <p:sp>
+        <p:nvSpPr>
+          <p:cNvPr id="53" name="Ellipse 52">
+            <a:extLst>
+              <a:ext uri="{FF2B5EF4-FFF2-40B4-BE49-F238E27FC236}">
+                <a16:creationId xmlns:a16="http://schemas.microsoft.com/office/drawing/2014/main" id="{3C3D27F3-C708-4AAF-BB02-E3B101BB3478}"/>
+              </a:ext>
+            </a:extLst>
+          </p:cNvPr>
+          <p:cNvSpPr/>
+          <p:nvPr/>
+        </p:nvSpPr>
+        <p:spPr>
+          <a:xfrm>
+            <a:off x="1122121" y="548680"/>
+            <a:ext cx="190434" cy="190434"/>
+          </a:xfrm>
+          <a:prstGeom prst="ellipse">
+            <a:avLst/>
+          </a:prstGeom>
+          <a:solidFill>
+            <a:srgbClr val="006600"/>
+          </a:solidFill>
+          <a:ln>
+            <a:noFill/>
+          </a:ln>
+        </p:spPr>
+        <p:style>
+          <a:lnRef idx="2">
+            <a:schemeClr val="accent1">
+              <a:shade val="50000"/>
+            </a:schemeClr>
+          </a:lnRef>
+          <a:fillRef idx="1">
+            <a:schemeClr val="accent1"/>
+          </a:fillRef>
+          <a:effectRef idx="0">
+            <a:schemeClr val="accent1"/>
+          </a:effectRef>
+          <a:fontRef idx="minor">
+            <a:schemeClr val="lt1"/>
+          </a:fontRef>
+        </p:style>
+        <p:txBody>
+          <a:bodyPr rtlCol="0" anchor="ctr"/>
+          <a:lstStyle/>
+          <a:p>
+            <a:pPr algn="ctr"/>
+            <a:endParaRPr lang="fr-FR"/>
+          </a:p>
+        </p:txBody>
+      </p:sp>
+      <p:pic>
+        <p:nvPicPr>
+          <p:cNvPr id="5" name="Image 4">
+            <a:extLst>
+              <a:ext uri="{FF2B5EF4-FFF2-40B4-BE49-F238E27FC236}">
+                <a16:creationId xmlns:a16="http://schemas.microsoft.com/office/drawing/2014/main" id="{52171793-597F-4B10-9782-867BD3F93A04}"/>
+              </a:ext>
+            </a:extLst>
+          </p:cNvPr>
+          <p:cNvPicPr>
+            <a:picLocks noChangeAspect="1"/>
+          </p:cNvPicPr>
+          <p:nvPr/>
+        </p:nvPicPr>
+        <p:blipFill>
+          <a:blip r:embed="rId7"/>
+          <a:stretch>
+            <a:fillRect/>
+          </a:stretch>
+        </p:blipFill>
+        <p:spPr>
+          <a:xfrm>
+            <a:off x="2590938" y="123153"/>
+            <a:ext cx="4824536" cy="763730"/>
           </a:xfrm>
           <a:prstGeom prst="rect">
             <a:avLst/>
@@ -5390,7 +6938,7 @@
     </p:spTree>
     <p:extLst>
       <p:ext uri="{BB962C8B-B14F-4D97-AF65-F5344CB8AC3E}">
-        <p14:creationId xmlns:p14="http://schemas.microsoft.com/office/powerpoint/2010/main" val="3050280596"/>
+        <p14:creationId xmlns:p14="http://schemas.microsoft.com/office/powerpoint/2010/main" val="2648623777"/>
       </p:ext>
     </p:extLst>
   </p:cSld>
@@ -5401,6 +6949,1867 @@
 </file>
 
 <file path=ppt/slides/slide4.xml><?xml version="1.0" encoding="utf-8"?>
+<p:sld xmlns:a="http://schemas.openxmlformats.org/drawingml/2006/main" xmlns:r="http://schemas.openxmlformats.org/officeDocument/2006/relationships" xmlns:p="http://schemas.openxmlformats.org/presentationml/2006/main">
+  <p:cSld>
+    <p:spTree>
+      <p:nvGrpSpPr>
+        <p:cNvPr id="1" name=""/>
+        <p:cNvGrpSpPr/>
+        <p:nvPr/>
+      </p:nvGrpSpPr>
+      <p:grpSpPr>
+        <a:xfrm>
+          <a:off x="0" y="0"/>
+          <a:ext cx="0" cy="0"/>
+          <a:chOff x="0" y="0"/>
+          <a:chExt cx="0" cy="0"/>
+        </a:xfrm>
+      </p:grpSpPr>
+      <p:sp>
+        <p:nvSpPr>
+          <p:cNvPr id="4" name="Rectangle 3">
+            <a:extLst>
+              <a:ext uri="{FF2B5EF4-FFF2-40B4-BE49-F238E27FC236}">
+                <a16:creationId xmlns:a16="http://schemas.microsoft.com/office/drawing/2014/main" id="{97A08B69-3B1C-4AA6-935F-B8DA4B2E66E8}"/>
+              </a:ext>
+            </a:extLst>
+          </p:cNvPr>
+          <p:cNvSpPr/>
+          <p:nvPr/>
+        </p:nvSpPr>
+        <p:spPr>
+          <a:xfrm rot="16200000">
+            <a:off x="4169643" y="801337"/>
+            <a:ext cx="396000" cy="5100986"/>
+          </a:xfrm>
+          <a:prstGeom prst="rect">
+            <a:avLst/>
+          </a:prstGeom>
+          <a:gradFill>
+            <a:gsLst>
+              <a:gs pos="0">
+                <a:srgbClr val="0070C0"/>
+              </a:gs>
+              <a:gs pos="50000">
+                <a:srgbClr val="FFFF00"/>
+              </a:gs>
+              <a:gs pos="100000">
+                <a:srgbClr val="FF0000"/>
+              </a:gs>
+            </a:gsLst>
+            <a:lin ang="5400000" scaled="1"/>
+          </a:gradFill>
+        </p:spPr>
+        <p:style>
+          <a:lnRef idx="2">
+            <a:schemeClr val="accent1">
+              <a:shade val="50000"/>
+            </a:schemeClr>
+          </a:lnRef>
+          <a:fillRef idx="1">
+            <a:schemeClr val="accent1"/>
+          </a:fillRef>
+          <a:effectRef idx="0">
+            <a:schemeClr val="accent1"/>
+          </a:effectRef>
+          <a:fontRef idx="minor">
+            <a:schemeClr val="lt1"/>
+          </a:fontRef>
+        </p:style>
+        <p:txBody>
+          <a:bodyPr rot="0" spcFirstLastPara="0" vertOverflow="overflow" horzOverflow="overflow" vert="horz" wrap="square" lIns="68580" tIns="34290" rIns="68580" bIns="34290" numCol="1" spcCol="0" rtlCol="0" fromWordArt="0" anchor="ctr" anchorCtr="0" forceAA="0" compatLnSpc="1">
+            <a:prstTxWarp prst="textNoShape">
+              <a:avLst/>
+            </a:prstTxWarp>
+            <a:noAutofit/>
+          </a:bodyPr>
+          <a:lstStyle/>
+          <a:p>
+            <a:pPr algn="ctr" defTabSz="685800">
+              <a:spcAft>
+                <a:spcPts val="450"/>
+              </a:spcAft>
+            </a:pPr>
+            <a:br>
+              <a:rPr lang="fr-FR" sz="1350" dirty="0">
+                <a:solidFill>
+                  <a:prstClr val="white"/>
+                </a:solidFill>
+                <a:latin typeface="Calibri" panose="020F0502020204030204"/>
+              </a:rPr>
+            </a:br>
+            <a:endParaRPr lang="fr-FR" sz="1350" dirty="0">
+              <a:solidFill>
+                <a:prstClr val="white"/>
+              </a:solidFill>
+              <a:latin typeface="Calibri" panose="020F0502020204030204"/>
+            </a:endParaRPr>
+          </a:p>
+        </p:txBody>
+      </p:sp>
+      <p:sp>
+        <p:nvSpPr>
+          <p:cNvPr id="2" name="Titre 1">
+            <a:extLst>
+              <a:ext uri="{FF2B5EF4-FFF2-40B4-BE49-F238E27FC236}">
+                <a16:creationId xmlns:a16="http://schemas.microsoft.com/office/drawing/2014/main" id="{8059E6FA-5ED7-4859-9321-2086931B31A3}"/>
+              </a:ext>
+            </a:extLst>
+          </p:cNvPr>
+          <p:cNvSpPr>
+            <a:spLocks noGrp="1"/>
+          </p:cNvSpPr>
+          <p:nvPr>
+            <p:ph type="title"/>
+          </p:nvPr>
+        </p:nvSpPr>
+        <p:spPr/>
+        <p:txBody>
+          <a:bodyPr>
+            <a:normAutofit fontScale="90000"/>
+          </a:bodyPr>
+          <a:lstStyle/>
+          <a:p>
+            <a:r>
+              <a:rPr lang="fr-FR" dirty="0"/>
+              <a:t>Gamme de couleurs pour température</a:t>
+            </a:r>
+            <a:br>
+              <a:rPr lang="fr-FR" dirty="0"/>
+            </a:br>
+            <a:r>
+              <a:rPr lang="fr-FR" dirty="0"/>
+              <a:t>04.05.2026</a:t>
+            </a:r>
+          </a:p>
+        </p:txBody>
+      </p:sp>
+      <p:sp>
+        <p:nvSpPr>
+          <p:cNvPr id="25" name="Rectangle 24">
+            <a:extLst>
+              <a:ext uri="{FF2B5EF4-FFF2-40B4-BE49-F238E27FC236}">
+                <a16:creationId xmlns:a16="http://schemas.microsoft.com/office/drawing/2014/main" id="{180B77EA-ECCE-4809-86D7-2D88840298AB}"/>
+              </a:ext>
+            </a:extLst>
+          </p:cNvPr>
+          <p:cNvSpPr/>
+          <p:nvPr/>
+        </p:nvSpPr>
+        <p:spPr>
+          <a:xfrm>
+            <a:off x="5923197" y="1116746"/>
+            <a:ext cx="288032" cy="288032"/>
+          </a:xfrm>
+          <a:prstGeom prst="rect">
+            <a:avLst/>
+          </a:prstGeom>
+          <a:solidFill>
+            <a:schemeClr val="bg1"/>
+          </a:solidFill>
+        </p:spPr>
+        <p:style>
+          <a:lnRef idx="2">
+            <a:schemeClr val="accent1">
+              <a:shade val="50000"/>
+            </a:schemeClr>
+          </a:lnRef>
+          <a:fillRef idx="1">
+            <a:schemeClr val="accent1"/>
+          </a:fillRef>
+          <a:effectRef idx="0">
+            <a:schemeClr val="accent1"/>
+          </a:effectRef>
+          <a:fontRef idx="minor">
+            <a:schemeClr val="lt1"/>
+          </a:fontRef>
+        </p:style>
+        <p:txBody>
+          <a:bodyPr rtlCol="0" anchor="ctr"/>
+          <a:lstStyle/>
+          <a:p>
+            <a:pPr algn="ctr"/>
+            <a:endParaRPr lang="fr-FR"/>
+          </a:p>
+        </p:txBody>
+      </p:sp>
+      <p:sp>
+        <p:nvSpPr>
+          <p:cNvPr id="26" name="Rectangle 25">
+            <a:extLst>
+              <a:ext uri="{FF2B5EF4-FFF2-40B4-BE49-F238E27FC236}">
+                <a16:creationId xmlns:a16="http://schemas.microsoft.com/office/drawing/2014/main" id="{3F0753EE-E706-4737-9865-F37076117640}"/>
+              </a:ext>
+            </a:extLst>
+          </p:cNvPr>
+          <p:cNvSpPr/>
+          <p:nvPr/>
+        </p:nvSpPr>
+        <p:spPr>
+          <a:xfrm>
+            <a:off x="3187915" y="1116746"/>
+            <a:ext cx="288032" cy="288032"/>
+          </a:xfrm>
+          <a:prstGeom prst="rect">
+            <a:avLst/>
+          </a:prstGeom>
+          <a:solidFill>
+            <a:srgbClr val="000AF3"/>
+          </a:solidFill>
+        </p:spPr>
+        <p:style>
+          <a:lnRef idx="2">
+            <a:schemeClr val="accent1">
+              <a:shade val="50000"/>
+            </a:schemeClr>
+          </a:lnRef>
+          <a:fillRef idx="1">
+            <a:schemeClr val="accent1"/>
+          </a:fillRef>
+          <a:effectRef idx="0">
+            <a:schemeClr val="accent1"/>
+          </a:effectRef>
+          <a:fontRef idx="minor">
+            <a:schemeClr val="lt1"/>
+          </a:fontRef>
+        </p:style>
+        <p:txBody>
+          <a:bodyPr rtlCol="0" anchor="ctr"/>
+          <a:lstStyle/>
+          <a:p>
+            <a:pPr algn="ctr"/>
+            <a:endParaRPr lang="fr-FR"/>
+          </a:p>
+        </p:txBody>
+      </p:sp>
+      <p:sp>
+        <p:nvSpPr>
+          <p:cNvPr id="27" name="Rectangle 26">
+            <a:extLst>
+              <a:ext uri="{FF2B5EF4-FFF2-40B4-BE49-F238E27FC236}">
+                <a16:creationId xmlns:a16="http://schemas.microsoft.com/office/drawing/2014/main" id="{88CE9E63-D487-494F-AC48-866655A1006B}"/>
+              </a:ext>
+            </a:extLst>
+          </p:cNvPr>
+          <p:cNvSpPr/>
+          <p:nvPr/>
+        </p:nvSpPr>
+        <p:spPr>
+          <a:xfrm>
+            <a:off x="3578670" y="1116746"/>
+            <a:ext cx="288032" cy="288032"/>
+          </a:xfrm>
+          <a:prstGeom prst="rect">
+            <a:avLst/>
+          </a:prstGeom>
+          <a:solidFill>
+            <a:srgbClr val="00AF51"/>
+          </a:solidFill>
+        </p:spPr>
+        <p:style>
+          <a:lnRef idx="2">
+            <a:schemeClr val="accent1">
+              <a:shade val="50000"/>
+            </a:schemeClr>
+          </a:lnRef>
+          <a:fillRef idx="1">
+            <a:schemeClr val="accent1"/>
+          </a:fillRef>
+          <a:effectRef idx="0">
+            <a:schemeClr val="accent1"/>
+          </a:effectRef>
+          <a:fontRef idx="minor">
+            <a:schemeClr val="lt1"/>
+          </a:fontRef>
+        </p:style>
+        <p:txBody>
+          <a:bodyPr rtlCol="0" anchor="ctr"/>
+          <a:lstStyle/>
+          <a:p>
+            <a:pPr algn="ctr"/>
+            <a:endParaRPr lang="fr-FR"/>
+          </a:p>
+        </p:txBody>
+      </p:sp>
+      <p:sp>
+        <p:nvSpPr>
+          <p:cNvPr id="28" name="Rectangle 27">
+            <a:extLst>
+              <a:ext uri="{FF2B5EF4-FFF2-40B4-BE49-F238E27FC236}">
+                <a16:creationId xmlns:a16="http://schemas.microsoft.com/office/drawing/2014/main" id="{FAF496D8-523A-4FD4-90CA-E86BE8A49548}"/>
+              </a:ext>
+            </a:extLst>
+          </p:cNvPr>
+          <p:cNvSpPr/>
+          <p:nvPr/>
+        </p:nvSpPr>
+        <p:spPr>
+          <a:xfrm>
+            <a:off x="3969425" y="1116746"/>
+            <a:ext cx="288032" cy="288032"/>
+          </a:xfrm>
+          <a:prstGeom prst="rect">
+            <a:avLst/>
+          </a:prstGeom>
+          <a:solidFill>
+            <a:srgbClr val="3EFF00"/>
+          </a:solidFill>
+        </p:spPr>
+        <p:style>
+          <a:lnRef idx="2">
+            <a:schemeClr val="accent1">
+              <a:shade val="50000"/>
+            </a:schemeClr>
+          </a:lnRef>
+          <a:fillRef idx="1">
+            <a:schemeClr val="accent1"/>
+          </a:fillRef>
+          <a:effectRef idx="0">
+            <a:schemeClr val="accent1"/>
+          </a:effectRef>
+          <a:fontRef idx="minor">
+            <a:schemeClr val="lt1"/>
+          </a:fontRef>
+        </p:style>
+        <p:txBody>
+          <a:bodyPr rtlCol="0" anchor="ctr"/>
+          <a:lstStyle/>
+          <a:p>
+            <a:pPr algn="ctr"/>
+            <a:endParaRPr lang="fr-FR"/>
+          </a:p>
+        </p:txBody>
+      </p:sp>
+      <p:sp>
+        <p:nvSpPr>
+          <p:cNvPr id="29" name="Rectangle 28">
+            <a:extLst>
+              <a:ext uri="{FF2B5EF4-FFF2-40B4-BE49-F238E27FC236}">
+                <a16:creationId xmlns:a16="http://schemas.microsoft.com/office/drawing/2014/main" id="{ED0E25C1-D1F4-4F0F-994E-8D7869F9ACF5}"/>
+              </a:ext>
+            </a:extLst>
+          </p:cNvPr>
+          <p:cNvSpPr/>
+          <p:nvPr/>
+        </p:nvSpPr>
+        <p:spPr>
+          <a:xfrm>
+            <a:off x="4360180" y="1116746"/>
+            <a:ext cx="288032" cy="288032"/>
+          </a:xfrm>
+          <a:prstGeom prst="rect">
+            <a:avLst/>
+          </a:prstGeom>
+          <a:solidFill>
+            <a:srgbClr val="FFFB01"/>
+          </a:solidFill>
+        </p:spPr>
+        <p:style>
+          <a:lnRef idx="2">
+            <a:schemeClr val="accent1">
+              <a:shade val="50000"/>
+            </a:schemeClr>
+          </a:lnRef>
+          <a:fillRef idx="1">
+            <a:schemeClr val="accent1"/>
+          </a:fillRef>
+          <a:effectRef idx="0">
+            <a:schemeClr val="accent1"/>
+          </a:effectRef>
+          <a:fontRef idx="minor">
+            <a:schemeClr val="lt1"/>
+          </a:fontRef>
+        </p:style>
+        <p:txBody>
+          <a:bodyPr rtlCol="0" anchor="ctr"/>
+          <a:lstStyle/>
+          <a:p>
+            <a:pPr algn="ctr"/>
+            <a:endParaRPr lang="fr-FR"/>
+          </a:p>
+        </p:txBody>
+      </p:sp>
+      <p:sp>
+        <p:nvSpPr>
+          <p:cNvPr id="30" name="Rectangle 29">
+            <a:extLst>
+              <a:ext uri="{FF2B5EF4-FFF2-40B4-BE49-F238E27FC236}">
+                <a16:creationId xmlns:a16="http://schemas.microsoft.com/office/drawing/2014/main" id="{A518501A-D9F4-44A4-8AE4-F0062E452197}"/>
+              </a:ext>
+            </a:extLst>
+          </p:cNvPr>
+          <p:cNvSpPr/>
+          <p:nvPr/>
+        </p:nvSpPr>
+        <p:spPr>
+          <a:xfrm>
+            <a:off x="4750935" y="1116746"/>
+            <a:ext cx="288032" cy="288032"/>
+          </a:xfrm>
+          <a:prstGeom prst="rect">
+            <a:avLst/>
+          </a:prstGeom>
+          <a:solidFill>
+            <a:srgbClr val="FFA800"/>
+          </a:solidFill>
+        </p:spPr>
+        <p:style>
+          <a:lnRef idx="2">
+            <a:schemeClr val="accent1">
+              <a:shade val="50000"/>
+            </a:schemeClr>
+          </a:lnRef>
+          <a:fillRef idx="1">
+            <a:schemeClr val="accent1"/>
+          </a:fillRef>
+          <a:effectRef idx="0">
+            <a:schemeClr val="accent1"/>
+          </a:effectRef>
+          <a:fontRef idx="minor">
+            <a:schemeClr val="lt1"/>
+          </a:fontRef>
+        </p:style>
+        <p:txBody>
+          <a:bodyPr rtlCol="0" anchor="ctr"/>
+          <a:lstStyle/>
+          <a:p>
+            <a:pPr algn="ctr"/>
+            <a:endParaRPr lang="fr-FR"/>
+          </a:p>
+        </p:txBody>
+      </p:sp>
+      <p:sp>
+        <p:nvSpPr>
+          <p:cNvPr id="31" name="Rectangle 30">
+            <a:extLst>
+              <a:ext uri="{FF2B5EF4-FFF2-40B4-BE49-F238E27FC236}">
+                <a16:creationId xmlns:a16="http://schemas.microsoft.com/office/drawing/2014/main" id="{5B8EC6C5-04EE-4FAB-A4A6-46FFA764FDF2}"/>
+              </a:ext>
+            </a:extLst>
+          </p:cNvPr>
+          <p:cNvSpPr/>
+          <p:nvPr/>
+        </p:nvSpPr>
+        <p:spPr>
+          <a:xfrm>
+            <a:off x="5141690" y="1116746"/>
+            <a:ext cx="288032" cy="288032"/>
+          </a:xfrm>
+          <a:prstGeom prst="rect">
+            <a:avLst/>
+          </a:prstGeom>
+          <a:solidFill>
+            <a:srgbClr val="FF6D00"/>
+          </a:solidFill>
+        </p:spPr>
+        <p:style>
+          <a:lnRef idx="2">
+            <a:schemeClr val="accent1">
+              <a:shade val="50000"/>
+            </a:schemeClr>
+          </a:lnRef>
+          <a:fillRef idx="1">
+            <a:schemeClr val="accent1"/>
+          </a:fillRef>
+          <a:effectRef idx="0">
+            <a:schemeClr val="accent1"/>
+          </a:effectRef>
+          <a:fontRef idx="minor">
+            <a:schemeClr val="lt1"/>
+          </a:fontRef>
+        </p:style>
+        <p:txBody>
+          <a:bodyPr rtlCol="0" anchor="ctr"/>
+          <a:lstStyle/>
+          <a:p>
+            <a:pPr algn="ctr"/>
+            <a:endParaRPr lang="fr-FR"/>
+          </a:p>
+        </p:txBody>
+      </p:sp>
+      <p:sp>
+        <p:nvSpPr>
+          <p:cNvPr id="32" name="Rectangle 31">
+            <a:extLst>
+              <a:ext uri="{FF2B5EF4-FFF2-40B4-BE49-F238E27FC236}">
+                <a16:creationId xmlns:a16="http://schemas.microsoft.com/office/drawing/2014/main" id="{7E23A5A8-2505-4BFC-9B1E-00AEB6A07958}"/>
+              </a:ext>
+            </a:extLst>
+          </p:cNvPr>
+          <p:cNvSpPr/>
+          <p:nvPr/>
+        </p:nvSpPr>
+        <p:spPr>
+          <a:xfrm>
+            <a:off x="5532445" y="1116746"/>
+            <a:ext cx="288032" cy="288032"/>
+          </a:xfrm>
+          <a:prstGeom prst="rect">
+            <a:avLst/>
+          </a:prstGeom>
+          <a:solidFill>
+            <a:srgbClr val="FE1100"/>
+          </a:solidFill>
+        </p:spPr>
+        <p:style>
+          <a:lnRef idx="2">
+            <a:schemeClr val="accent1">
+              <a:shade val="50000"/>
+            </a:schemeClr>
+          </a:lnRef>
+          <a:fillRef idx="1">
+            <a:schemeClr val="accent1"/>
+          </a:fillRef>
+          <a:effectRef idx="0">
+            <a:schemeClr val="accent1"/>
+          </a:effectRef>
+          <a:fontRef idx="minor">
+            <a:schemeClr val="lt1"/>
+          </a:fontRef>
+        </p:style>
+        <p:txBody>
+          <a:bodyPr rtlCol="0" anchor="ctr"/>
+          <a:lstStyle/>
+          <a:p>
+            <a:pPr algn="ctr"/>
+            <a:endParaRPr lang="fr-FR"/>
+          </a:p>
+        </p:txBody>
+      </p:sp>
+      <p:sp>
+        <p:nvSpPr>
+          <p:cNvPr id="33" name="Rectangle 32">
+            <a:extLst>
+              <a:ext uri="{FF2B5EF4-FFF2-40B4-BE49-F238E27FC236}">
+                <a16:creationId xmlns:a16="http://schemas.microsoft.com/office/drawing/2014/main" id="{19A555FB-8069-47D1-AB9F-188EAF408B8A}"/>
+              </a:ext>
+            </a:extLst>
+          </p:cNvPr>
+          <p:cNvSpPr/>
+          <p:nvPr/>
+        </p:nvSpPr>
+        <p:spPr>
+          <a:xfrm>
+            <a:off x="5923197" y="1116746"/>
+            <a:ext cx="288032" cy="288032"/>
+          </a:xfrm>
+          <a:prstGeom prst="rect">
+            <a:avLst/>
+          </a:prstGeom>
+          <a:solidFill>
+            <a:schemeClr val="bg1"/>
+          </a:solidFill>
+        </p:spPr>
+        <p:style>
+          <a:lnRef idx="2">
+            <a:schemeClr val="accent1">
+              <a:shade val="50000"/>
+            </a:schemeClr>
+          </a:lnRef>
+          <a:fillRef idx="1">
+            <a:schemeClr val="accent1"/>
+          </a:fillRef>
+          <a:effectRef idx="0">
+            <a:schemeClr val="accent1"/>
+          </a:effectRef>
+          <a:fontRef idx="minor">
+            <a:schemeClr val="lt1"/>
+          </a:fontRef>
+        </p:style>
+        <p:txBody>
+          <a:bodyPr rtlCol="0" anchor="ctr"/>
+          <a:lstStyle/>
+          <a:p>
+            <a:pPr algn="ctr"/>
+            <a:endParaRPr lang="fr-FR"/>
+          </a:p>
+        </p:txBody>
+      </p:sp>
+      <p:sp>
+        <p:nvSpPr>
+          <p:cNvPr id="34" name="ZoneTexte 33">
+            <a:extLst>
+              <a:ext uri="{FF2B5EF4-FFF2-40B4-BE49-F238E27FC236}">
+                <a16:creationId xmlns:a16="http://schemas.microsoft.com/office/drawing/2014/main" id="{34E355B1-FC9A-43F3-B824-07AAA4E52BDA}"/>
+              </a:ext>
+            </a:extLst>
+          </p:cNvPr>
+          <p:cNvSpPr txBox="1"/>
+          <p:nvPr/>
+        </p:nvSpPr>
+        <p:spPr>
+          <a:xfrm>
+            <a:off x="-52894" y="2985025"/>
+            <a:ext cx="1812099" cy="707886"/>
+          </a:xfrm>
+          <a:prstGeom prst="rect">
+            <a:avLst/>
+          </a:prstGeom>
+          <a:noFill/>
+        </p:spPr>
+        <p:txBody>
+          <a:bodyPr wrap="none" rtlCol="0">
+            <a:spAutoFit/>
+          </a:bodyPr>
+          <a:lstStyle/>
+          <a:p>
+            <a:pPr algn="ctr"/>
+            <a:r>
+              <a:rPr lang="fr-FR" sz="2000" dirty="0" err="1">
+                <a:latin typeface="+mj-lt"/>
+              </a:rPr>
+              <a:t>Sea</a:t>
+            </a:r>
+            <a:r>
+              <a:rPr lang="fr-FR" sz="2000" dirty="0">
+                <a:latin typeface="+mj-lt"/>
+              </a:rPr>
+              <a:t>-surface</a:t>
+            </a:r>
+            <a:br>
+              <a:rPr lang="fr-FR" sz="2000" dirty="0">
+                <a:latin typeface="+mj-lt"/>
+              </a:rPr>
+            </a:br>
+            <a:r>
+              <a:rPr lang="fr-FR" sz="2000" dirty="0" err="1">
+                <a:latin typeface="+mj-lt"/>
+              </a:rPr>
+              <a:t>temperature</a:t>
+            </a:r>
+            <a:r>
+              <a:rPr lang="fr-FR" sz="2000" dirty="0">
+                <a:latin typeface="+mj-lt"/>
+              </a:rPr>
+              <a:t> °C</a:t>
+            </a:r>
+            <a:endParaRPr lang="fr-FR" sz="2000" baseline="30000" dirty="0">
+              <a:latin typeface="+mj-lt"/>
+            </a:endParaRPr>
+          </a:p>
+        </p:txBody>
+      </p:sp>
+      <p:sp>
+        <p:nvSpPr>
+          <p:cNvPr id="35" name="ZoneTexte 34">
+            <a:extLst>
+              <a:ext uri="{FF2B5EF4-FFF2-40B4-BE49-F238E27FC236}">
+                <a16:creationId xmlns:a16="http://schemas.microsoft.com/office/drawing/2014/main" id="{2E7F5A6D-96F4-47F3-B4DA-A8905E1E8DD8}"/>
+              </a:ext>
+            </a:extLst>
+          </p:cNvPr>
+          <p:cNvSpPr txBox="1"/>
+          <p:nvPr/>
+        </p:nvSpPr>
+        <p:spPr>
+          <a:xfrm>
+            <a:off x="3548973" y="1413781"/>
+            <a:ext cx="359394" cy="369332"/>
+          </a:xfrm>
+          <a:prstGeom prst="rect">
+            <a:avLst/>
+          </a:prstGeom>
+          <a:noFill/>
+        </p:spPr>
+        <p:txBody>
+          <a:bodyPr wrap="none" rtlCol="0">
+            <a:spAutoFit/>
+          </a:bodyPr>
+          <a:lstStyle/>
+          <a:p>
+            <a:r>
+              <a:rPr lang="fr-FR" dirty="0"/>
+              <a:t>.2</a:t>
+            </a:r>
+          </a:p>
+        </p:txBody>
+      </p:sp>
+      <p:sp>
+        <p:nvSpPr>
+          <p:cNvPr id="36" name="ZoneTexte 35">
+            <a:extLst>
+              <a:ext uri="{FF2B5EF4-FFF2-40B4-BE49-F238E27FC236}">
+                <a16:creationId xmlns:a16="http://schemas.microsoft.com/office/drawing/2014/main" id="{F51E41E7-58F4-4906-ACD3-24253361691C}"/>
+              </a:ext>
+            </a:extLst>
+          </p:cNvPr>
+          <p:cNvSpPr txBox="1"/>
+          <p:nvPr/>
+        </p:nvSpPr>
+        <p:spPr>
+          <a:xfrm>
+            <a:off x="3909013" y="1413781"/>
+            <a:ext cx="359394" cy="369332"/>
+          </a:xfrm>
+          <a:prstGeom prst="rect">
+            <a:avLst/>
+          </a:prstGeom>
+          <a:noFill/>
+        </p:spPr>
+        <p:txBody>
+          <a:bodyPr wrap="none" rtlCol="0">
+            <a:spAutoFit/>
+          </a:bodyPr>
+          <a:lstStyle/>
+          <a:p>
+            <a:r>
+              <a:rPr lang="fr-FR" dirty="0"/>
+              <a:t>.5</a:t>
+            </a:r>
+          </a:p>
+        </p:txBody>
+      </p:sp>
+      <p:sp>
+        <p:nvSpPr>
+          <p:cNvPr id="37" name="ZoneTexte 36">
+            <a:extLst>
+              <a:ext uri="{FF2B5EF4-FFF2-40B4-BE49-F238E27FC236}">
+                <a16:creationId xmlns:a16="http://schemas.microsoft.com/office/drawing/2014/main" id="{C0E751E8-7C4E-4146-B834-48692C2C7FFD}"/>
+              </a:ext>
+            </a:extLst>
+          </p:cNvPr>
+          <p:cNvSpPr txBox="1"/>
+          <p:nvPr/>
+        </p:nvSpPr>
+        <p:spPr>
+          <a:xfrm>
+            <a:off x="4341061" y="1413781"/>
+            <a:ext cx="359394" cy="369332"/>
+          </a:xfrm>
+          <a:prstGeom prst="rect">
+            <a:avLst/>
+          </a:prstGeom>
+          <a:noFill/>
+        </p:spPr>
+        <p:txBody>
+          <a:bodyPr wrap="none" rtlCol="0">
+            <a:spAutoFit/>
+          </a:bodyPr>
+          <a:lstStyle/>
+          <a:p>
+            <a:r>
+              <a:rPr lang="fr-FR" dirty="0"/>
+              <a:t>1.</a:t>
+            </a:r>
+          </a:p>
+        </p:txBody>
+      </p:sp>
+      <p:sp>
+        <p:nvSpPr>
+          <p:cNvPr id="38" name="ZoneTexte 37">
+            <a:extLst>
+              <a:ext uri="{FF2B5EF4-FFF2-40B4-BE49-F238E27FC236}">
+                <a16:creationId xmlns:a16="http://schemas.microsoft.com/office/drawing/2014/main" id="{4F7C15C8-1DD2-4494-8528-BB9FE83D9D51}"/>
+              </a:ext>
+            </a:extLst>
+          </p:cNvPr>
+          <p:cNvSpPr txBox="1"/>
+          <p:nvPr/>
+        </p:nvSpPr>
+        <p:spPr>
+          <a:xfrm>
+            <a:off x="4656091" y="1413781"/>
+            <a:ext cx="476412" cy="369332"/>
+          </a:xfrm>
+          <a:prstGeom prst="rect">
+            <a:avLst/>
+          </a:prstGeom>
+          <a:noFill/>
+        </p:spPr>
+        <p:txBody>
+          <a:bodyPr wrap="none" rtlCol="0">
+            <a:spAutoFit/>
+          </a:bodyPr>
+          <a:lstStyle/>
+          <a:p>
+            <a:r>
+              <a:rPr lang="fr-FR" dirty="0"/>
+              <a:t>1.5</a:t>
+            </a:r>
+          </a:p>
+        </p:txBody>
+      </p:sp>
+      <p:sp>
+        <p:nvSpPr>
+          <p:cNvPr id="39" name="ZoneTexte 38">
+            <a:extLst>
+              <a:ext uri="{FF2B5EF4-FFF2-40B4-BE49-F238E27FC236}">
+                <a16:creationId xmlns:a16="http://schemas.microsoft.com/office/drawing/2014/main" id="{7679C794-5CBA-405F-B27F-425A58C9A5D8}"/>
+              </a:ext>
+            </a:extLst>
+          </p:cNvPr>
+          <p:cNvSpPr txBox="1"/>
+          <p:nvPr/>
+        </p:nvSpPr>
+        <p:spPr>
+          <a:xfrm>
+            <a:off x="5097262" y="1413781"/>
+            <a:ext cx="359394" cy="369332"/>
+          </a:xfrm>
+          <a:prstGeom prst="rect">
+            <a:avLst/>
+          </a:prstGeom>
+          <a:noFill/>
+        </p:spPr>
+        <p:txBody>
+          <a:bodyPr wrap="none" rtlCol="0">
+            <a:spAutoFit/>
+          </a:bodyPr>
+          <a:lstStyle/>
+          <a:p>
+            <a:r>
+              <a:rPr lang="fr-FR" dirty="0"/>
+              <a:t>2.</a:t>
+            </a:r>
+          </a:p>
+        </p:txBody>
+      </p:sp>
+      <p:sp>
+        <p:nvSpPr>
+          <p:cNvPr id="40" name="ZoneTexte 39">
+            <a:extLst>
+              <a:ext uri="{FF2B5EF4-FFF2-40B4-BE49-F238E27FC236}">
+                <a16:creationId xmlns:a16="http://schemas.microsoft.com/office/drawing/2014/main" id="{9B8D997C-A1CF-4A29-9EEA-F1A5208B5832}"/>
+              </a:ext>
+            </a:extLst>
+          </p:cNvPr>
+          <p:cNvSpPr txBox="1"/>
+          <p:nvPr/>
+        </p:nvSpPr>
+        <p:spPr>
+          <a:xfrm>
+            <a:off x="5465998" y="1413781"/>
+            <a:ext cx="417102" cy="369332"/>
+          </a:xfrm>
+          <a:prstGeom prst="rect">
+            <a:avLst/>
+          </a:prstGeom>
+          <a:noFill/>
+        </p:spPr>
+        <p:txBody>
+          <a:bodyPr wrap="none" rtlCol="0">
+            <a:spAutoFit/>
+          </a:bodyPr>
+          <a:lstStyle/>
+          <a:p>
+            <a:r>
+              <a:rPr lang="fr-FR" dirty="0"/>
+              <a:t>&gt;3</a:t>
+            </a:r>
+          </a:p>
+        </p:txBody>
+      </p:sp>
+      <p:sp>
+        <p:nvSpPr>
+          <p:cNvPr id="41" name="ZoneTexte 40">
+            <a:extLst>
+              <a:ext uri="{FF2B5EF4-FFF2-40B4-BE49-F238E27FC236}">
+                <a16:creationId xmlns:a16="http://schemas.microsoft.com/office/drawing/2014/main" id="{93A023DE-035F-41BB-A13B-CC5A48C8436F}"/>
+              </a:ext>
+            </a:extLst>
+          </p:cNvPr>
+          <p:cNvSpPr txBox="1"/>
+          <p:nvPr/>
+        </p:nvSpPr>
+        <p:spPr>
+          <a:xfrm>
+            <a:off x="3058551" y="1413781"/>
+            <a:ext cx="474810" cy="369332"/>
+          </a:xfrm>
+          <a:prstGeom prst="rect">
+            <a:avLst/>
+          </a:prstGeom>
+          <a:noFill/>
+        </p:spPr>
+        <p:txBody>
+          <a:bodyPr wrap="none" rtlCol="0">
+            <a:spAutoFit/>
+          </a:bodyPr>
+          <a:lstStyle/>
+          <a:p>
+            <a:r>
+              <a:rPr lang="fr-FR" dirty="0"/>
+              <a:t>&lt;.2</a:t>
+            </a:r>
+          </a:p>
+        </p:txBody>
+      </p:sp>
+      <p:sp>
+        <p:nvSpPr>
+          <p:cNvPr id="42" name="ZoneTexte 41">
+            <a:extLst>
+              <a:ext uri="{FF2B5EF4-FFF2-40B4-BE49-F238E27FC236}">
+                <a16:creationId xmlns:a16="http://schemas.microsoft.com/office/drawing/2014/main" id="{679C1387-79C0-4FE0-9058-8E1888447445}"/>
+              </a:ext>
+            </a:extLst>
+          </p:cNvPr>
+          <p:cNvSpPr txBox="1"/>
+          <p:nvPr/>
+        </p:nvSpPr>
+        <p:spPr>
+          <a:xfrm>
+            <a:off x="5853463" y="1444558"/>
+            <a:ext cx="502061" cy="307777"/>
+          </a:xfrm>
+          <a:prstGeom prst="rect">
+            <a:avLst/>
+          </a:prstGeom>
+          <a:noFill/>
+        </p:spPr>
+        <p:txBody>
+          <a:bodyPr wrap="none" rtlCol="0">
+            <a:spAutoFit/>
+          </a:bodyPr>
+          <a:lstStyle/>
+          <a:p>
+            <a:r>
+              <a:rPr lang="fr-FR" sz="1400" dirty="0"/>
+              <a:t>land</a:t>
+            </a:r>
+          </a:p>
+        </p:txBody>
+      </p:sp>
+      <p:sp>
+        <p:nvSpPr>
+          <p:cNvPr id="5" name="Rectangle 4">
+            <a:extLst>
+              <a:ext uri="{FF2B5EF4-FFF2-40B4-BE49-F238E27FC236}">
+                <a16:creationId xmlns:a16="http://schemas.microsoft.com/office/drawing/2014/main" id="{03DC80F8-B02C-4EE7-AE0F-3E0F7F9A81B0}"/>
+              </a:ext>
+            </a:extLst>
+          </p:cNvPr>
+          <p:cNvSpPr/>
+          <p:nvPr/>
+        </p:nvSpPr>
+        <p:spPr>
+          <a:xfrm>
+            <a:off x="1814513" y="3140968"/>
+            <a:ext cx="423569" cy="396000"/>
+          </a:xfrm>
+          <a:prstGeom prst="rect">
+            <a:avLst/>
+          </a:prstGeom>
+          <a:noFill/>
+          <a:ln w="9525"/>
+        </p:spPr>
+        <p:style>
+          <a:lnRef idx="2">
+            <a:schemeClr val="accent1">
+              <a:shade val="50000"/>
+            </a:schemeClr>
+          </a:lnRef>
+          <a:fillRef idx="1">
+            <a:schemeClr val="accent1"/>
+          </a:fillRef>
+          <a:effectRef idx="0">
+            <a:schemeClr val="accent1"/>
+          </a:effectRef>
+          <a:fontRef idx="minor">
+            <a:schemeClr val="lt1"/>
+          </a:fontRef>
+        </p:style>
+        <p:txBody>
+          <a:bodyPr rot="0" spcFirstLastPara="0" vertOverflow="overflow" horzOverflow="overflow" vert="horz" wrap="square" lIns="68580" tIns="34290" rIns="68580" bIns="34290" numCol="1" spcCol="0" rtlCol="0" fromWordArt="0" anchor="ctr" anchorCtr="0" forceAA="0" compatLnSpc="1">
+            <a:prstTxWarp prst="textNoShape">
+              <a:avLst/>
+            </a:prstTxWarp>
+            <a:noAutofit/>
+          </a:bodyPr>
+          <a:lstStyle/>
+          <a:p>
+            <a:pPr algn="ctr" defTabSz="685800"/>
+            <a:r>
+              <a:rPr lang="fr-FR" sz="1350" dirty="0">
+                <a:ln w="0"/>
+                <a:solidFill>
+                  <a:schemeClr val="tx1"/>
+                </a:solidFill>
+                <a:effectLst>
+                  <a:outerShdw blurRad="38100" dist="19050" dir="2700000" algn="tl" rotWithShape="0">
+                    <a:schemeClr val="dk1">
+                      <a:alpha val="40000"/>
+                    </a:schemeClr>
+                  </a:outerShdw>
+                </a:effectLst>
+                <a:latin typeface="Calibri" panose="020F0502020204030204"/>
+              </a:rPr>
+              <a:t>19</a:t>
+            </a:r>
+          </a:p>
+        </p:txBody>
+      </p:sp>
+      <p:sp>
+        <p:nvSpPr>
+          <p:cNvPr id="6" name="Rectangle 5">
+            <a:extLst>
+              <a:ext uri="{FF2B5EF4-FFF2-40B4-BE49-F238E27FC236}">
+                <a16:creationId xmlns:a16="http://schemas.microsoft.com/office/drawing/2014/main" id="{46C66F71-8875-46F8-8A60-CB042CEA5E39}"/>
+              </a:ext>
+            </a:extLst>
+          </p:cNvPr>
+          <p:cNvSpPr/>
+          <p:nvPr/>
+        </p:nvSpPr>
+        <p:spPr>
+          <a:xfrm>
+            <a:off x="2239972" y="3140968"/>
+            <a:ext cx="423569" cy="396000"/>
+          </a:xfrm>
+          <a:prstGeom prst="rect">
+            <a:avLst/>
+          </a:prstGeom>
+          <a:noFill/>
+          <a:ln w="9525"/>
+        </p:spPr>
+        <p:style>
+          <a:lnRef idx="2">
+            <a:schemeClr val="accent1">
+              <a:shade val="50000"/>
+            </a:schemeClr>
+          </a:lnRef>
+          <a:fillRef idx="1">
+            <a:schemeClr val="accent1"/>
+          </a:fillRef>
+          <a:effectRef idx="0">
+            <a:schemeClr val="accent1"/>
+          </a:effectRef>
+          <a:fontRef idx="minor">
+            <a:schemeClr val="lt1"/>
+          </a:fontRef>
+        </p:style>
+        <p:txBody>
+          <a:bodyPr rot="0" spcFirstLastPara="0" vertOverflow="overflow" horzOverflow="overflow" vert="horz" wrap="square" lIns="68580" tIns="34290" rIns="68580" bIns="34290" numCol="1" spcCol="0" rtlCol="0" fromWordArt="0" anchor="ctr" anchorCtr="0" forceAA="0" compatLnSpc="1">
+            <a:prstTxWarp prst="textNoShape">
+              <a:avLst/>
+            </a:prstTxWarp>
+            <a:noAutofit/>
+          </a:bodyPr>
+          <a:lstStyle/>
+          <a:p>
+            <a:pPr algn="ctr" defTabSz="685800"/>
+            <a:r>
+              <a:rPr lang="fr-FR" sz="1350" dirty="0">
+                <a:ln w="0"/>
+                <a:solidFill>
+                  <a:schemeClr val="tx1"/>
+                </a:solidFill>
+                <a:effectLst>
+                  <a:outerShdw blurRad="38100" dist="19050" dir="2700000" algn="tl" rotWithShape="0">
+                    <a:schemeClr val="dk1">
+                      <a:alpha val="40000"/>
+                    </a:schemeClr>
+                  </a:outerShdw>
+                </a:effectLst>
+                <a:latin typeface="Calibri" panose="020F0502020204030204"/>
+              </a:rPr>
+              <a:t>20</a:t>
+            </a:r>
+          </a:p>
+        </p:txBody>
+      </p:sp>
+      <p:sp>
+        <p:nvSpPr>
+          <p:cNvPr id="7" name="Rectangle 6">
+            <a:extLst>
+              <a:ext uri="{FF2B5EF4-FFF2-40B4-BE49-F238E27FC236}">
+                <a16:creationId xmlns:a16="http://schemas.microsoft.com/office/drawing/2014/main" id="{A1F761E1-AF4A-4FFE-B287-CB0502520D42}"/>
+              </a:ext>
+            </a:extLst>
+          </p:cNvPr>
+          <p:cNvSpPr/>
+          <p:nvPr/>
+        </p:nvSpPr>
+        <p:spPr>
+          <a:xfrm>
+            <a:off x="2665431" y="3140968"/>
+            <a:ext cx="423569" cy="396000"/>
+          </a:xfrm>
+          <a:prstGeom prst="rect">
+            <a:avLst/>
+          </a:prstGeom>
+          <a:noFill/>
+          <a:ln w="9525"/>
+        </p:spPr>
+        <p:style>
+          <a:lnRef idx="2">
+            <a:schemeClr val="accent1">
+              <a:shade val="50000"/>
+            </a:schemeClr>
+          </a:lnRef>
+          <a:fillRef idx="1">
+            <a:schemeClr val="accent1"/>
+          </a:fillRef>
+          <a:effectRef idx="0">
+            <a:schemeClr val="accent1"/>
+          </a:effectRef>
+          <a:fontRef idx="minor">
+            <a:schemeClr val="lt1"/>
+          </a:fontRef>
+        </p:style>
+        <p:txBody>
+          <a:bodyPr rot="0" spcFirstLastPara="0" vertOverflow="overflow" horzOverflow="overflow" vert="horz" wrap="square" lIns="68580" tIns="34290" rIns="68580" bIns="34290" numCol="1" spcCol="0" rtlCol="0" fromWordArt="0" anchor="ctr" anchorCtr="0" forceAA="0" compatLnSpc="1">
+            <a:prstTxWarp prst="textNoShape">
+              <a:avLst/>
+            </a:prstTxWarp>
+            <a:noAutofit/>
+          </a:bodyPr>
+          <a:lstStyle/>
+          <a:p>
+            <a:pPr algn="ctr" defTabSz="685800"/>
+            <a:r>
+              <a:rPr lang="fr-FR" sz="1350" dirty="0">
+                <a:ln w="0"/>
+                <a:solidFill>
+                  <a:schemeClr val="tx1"/>
+                </a:solidFill>
+                <a:effectLst>
+                  <a:outerShdw blurRad="38100" dist="19050" dir="2700000" algn="tl" rotWithShape="0">
+                    <a:schemeClr val="dk1">
+                      <a:alpha val="40000"/>
+                    </a:schemeClr>
+                  </a:outerShdw>
+                </a:effectLst>
+                <a:latin typeface="Calibri" panose="020F0502020204030204"/>
+              </a:rPr>
+              <a:t>21</a:t>
+            </a:r>
+          </a:p>
+        </p:txBody>
+      </p:sp>
+      <p:sp>
+        <p:nvSpPr>
+          <p:cNvPr id="8" name="Rectangle 7">
+            <a:extLst>
+              <a:ext uri="{FF2B5EF4-FFF2-40B4-BE49-F238E27FC236}">
+                <a16:creationId xmlns:a16="http://schemas.microsoft.com/office/drawing/2014/main" id="{83EF05A6-1ED4-4267-862E-6A810EBF9BF2}"/>
+              </a:ext>
+            </a:extLst>
+          </p:cNvPr>
+          <p:cNvSpPr/>
+          <p:nvPr/>
+        </p:nvSpPr>
+        <p:spPr>
+          <a:xfrm>
+            <a:off x="3090890" y="3140968"/>
+            <a:ext cx="423569" cy="396000"/>
+          </a:xfrm>
+          <a:prstGeom prst="rect">
+            <a:avLst/>
+          </a:prstGeom>
+          <a:noFill/>
+          <a:ln w="9525"/>
+        </p:spPr>
+        <p:style>
+          <a:lnRef idx="2">
+            <a:schemeClr val="accent1">
+              <a:shade val="50000"/>
+            </a:schemeClr>
+          </a:lnRef>
+          <a:fillRef idx="1">
+            <a:schemeClr val="accent1"/>
+          </a:fillRef>
+          <a:effectRef idx="0">
+            <a:schemeClr val="accent1"/>
+          </a:effectRef>
+          <a:fontRef idx="minor">
+            <a:schemeClr val="lt1"/>
+          </a:fontRef>
+        </p:style>
+        <p:txBody>
+          <a:bodyPr rot="0" spcFirstLastPara="0" vertOverflow="overflow" horzOverflow="overflow" vert="horz" wrap="square" lIns="68580" tIns="34290" rIns="68580" bIns="34290" numCol="1" spcCol="0" rtlCol="0" fromWordArt="0" anchor="ctr" anchorCtr="0" forceAA="0" compatLnSpc="1">
+            <a:prstTxWarp prst="textNoShape">
+              <a:avLst/>
+            </a:prstTxWarp>
+            <a:noAutofit/>
+          </a:bodyPr>
+          <a:lstStyle/>
+          <a:p>
+            <a:pPr algn="ctr" defTabSz="685800"/>
+            <a:r>
+              <a:rPr lang="fr-FR" sz="1350" dirty="0">
+                <a:ln w="0"/>
+                <a:solidFill>
+                  <a:schemeClr val="tx1"/>
+                </a:solidFill>
+                <a:effectLst>
+                  <a:outerShdw blurRad="38100" dist="19050" dir="2700000" algn="tl" rotWithShape="0">
+                    <a:schemeClr val="dk1">
+                      <a:alpha val="40000"/>
+                    </a:schemeClr>
+                  </a:outerShdw>
+                </a:effectLst>
+                <a:latin typeface="Calibri" panose="020F0502020204030204"/>
+              </a:rPr>
+              <a:t>22</a:t>
+            </a:r>
+          </a:p>
+        </p:txBody>
+      </p:sp>
+      <p:sp>
+        <p:nvSpPr>
+          <p:cNvPr id="9" name="Rectangle 8">
+            <a:extLst>
+              <a:ext uri="{FF2B5EF4-FFF2-40B4-BE49-F238E27FC236}">
+                <a16:creationId xmlns:a16="http://schemas.microsoft.com/office/drawing/2014/main" id="{22148DCB-56E3-42A2-AFEA-8CBA7D5EACBB}"/>
+              </a:ext>
+            </a:extLst>
+          </p:cNvPr>
+          <p:cNvSpPr/>
+          <p:nvPr/>
+        </p:nvSpPr>
+        <p:spPr>
+          <a:xfrm>
+            <a:off x="3516349" y="3140968"/>
+            <a:ext cx="423569" cy="396000"/>
+          </a:xfrm>
+          <a:prstGeom prst="rect">
+            <a:avLst/>
+          </a:prstGeom>
+          <a:noFill/>
+          <a:ln w="9525"/>
+        </p:spPr>
+        <p:style>
+          <a:lnRef idx="2">
+            <a:schemeClr val="accent1">
+              <a:shade val="50000"/>
+            </a:schemeClr>
+          </a:lnRef>
+          <a:fillRef idx="1">
+            <a:schemeClr val="accent1"/>
+          </a:fillRef>
+          <a:effectRef idx="0">
+            <a:schemeClr val="accent1"/>
+          </a:effectRef>
+          <a:fontRef idx="minor">
+            <a:schemeClr val="lt1"/>
+          </a:fontRef>
+        </p:style>
+        <p:txBody>
+          <a:bodyPr rot="0" spcFirstLastPara="0" vertOverflow="overflow" horzOverflow="overflow" vert="horz" wrap="square" lIns="68580" tIns="34290" rIns="68580" bIns="34290" numCol="1" spcCol="0" rtlCol="0" fromWordArt="0" anchor="ctr" anchorCtr="0" forceAA="0" compatLnSpc="1">
+            <a:prstTxWarp prst="textNoShape">
+              <a:avLst/>
+            </a:prstTxWarp>
+            <a:noAutofit/>
+          </a:bodyPr>
+          <a:lstStyle/>
+          <a:p>
+            <a:pPr algn="ctr" defTabSz="685800"/>
+            <a:r>
+              <a:rPr lang="fr-FR" sz="1350" dirty="0">
+                <a:ln w="0"/>
+                <a:solidFill>
+                  <a:schemeClr val="tx1"/>
+                </a:solidFill>
+                <a:effectLst>
+                  <a:outerShdw blurRad="38100" dist="19050" dir="2700000" algn="tl" rotWithShape="0">
+                    <a:schemeClr val="dk1">
+                      <a:alpha val="40000"/>
+                    </a:schemeClr>
+                  </a:outerShdw>
+                </a:effectLst>
+                <a:latin typeface="Calibri" panose="020F0502020204030204"/>
+              </a:rPr>
+              <a:t>23</a:t>
+            </a:r>
+          </a:p>
+        </p:txBody>
+      </p:sp>
+      <p:sp>
+        <p:nvSpPr>
+          <p:cNvPr id="10" name="Rectangle 9">
+            <a:extLst>
+              <a:ext uri="{FF2B5EF4-FFF2-40B4-BE49-F238E27FC236}">
+                <a16:creationId xmlns:a16="http://schemas.microsoft.com/office/drawing/2014/main" id="{80A3AB98-EF5F-488E-A53F-DB8AB76500DC}"/>
+              </a:ext>
+            </a:extLst>
+          </p:cNvPr>
+          <p:cNvSpPr/>
+          <p:nvPr/>
+        </p:nvSpPr>
+        <p:spPr>
+          <a:xfrm>
+            <a:off x="3941808" y="3140968"/>
+            <a:ext cx="423569" cy="396000"/>
+          </a:xfrm>
+          <a:prstGeom prst="rect">
+            <a:avLst/>
+          </a:prstGeom>
+          <a:noFill/>
+          <a:ln w="9525"/>
+        </p:spPr>
+        <p:style>
+          <a:lnRef idx="2">
+            <a:schemeClr val="accent1">
+              <a:shade val="50000"/>
+            </a:schemeClr>
+          </a:lnRef>
+          <a:fillRef idx="1">
+            <a:schemeClr val="accent1"/>
+          </a:fillRef>
+          <a:effectRef idx="0">
+            <a:schemeClr val="accent1"/>
+          </a:effectRef>
+          <a:fontRef idx="minor">
+            <a:schemeClr val="lt1"/>
+          </a:fontRef>
+        </p:style>
+        <p:txBody>
+          <a:bodyPr rot="0" spcFirstLastPara="0" vertOverflow="overflow" horzOverflow="overflow" vert="horz" wrap="square" lIns="68580" tIns="34290" rIns="68580" bIns="34290" numCol="1" spcCol="0" rtlCol="0" fromWordArt="0" anchor="ctr" anchorCtr="0" forceAA="0" compatLnSpc="1">
+            <a:prstTxWarp prst="textNoShape">
+              <a:avLst/>
+            </a:prstTxWarp>
+            <a:noAutofit/>
+          </a:bodyPr>
+          <a:lstStyle/>
+          <a:p>
+            <a:pPr algn="ctr" defTabSz="685800"/>
+            <a:r>
+              <a:rPr lang="fr-FR" sz="1350" dirty="0">
+                <a:ln w="0"/>
+                <a:solidFill>
+                  <a:schemeClr val="tx1"/>
+                </a:solidFill>
+                <a:effectLst>
+                  <a:outerShdw blurRad="38100" dist="19050" dir="2700000" algn="tl" rotWithShape="0">
+                    <a:schemeClr val="dk1">
+                      <a:alpha val="40000"/>
+                    </a:schemeClr>
+                  </a:outerShdw>
+                </a:effectLst>
+                <a:latin typeface="Calibri" panose="020F0502020204030204"/>
+              </a:rPr>
+              <a:t>24</a:t>
+            </a:r>
+          </a:p>
+        </p:txBody>
+      </p:sp>
+      <p:sp>
+        <p:nvSpPr>
+          <p:cNvPr id="11" name="Rectangle 10">
+            <a:extLst>
+              <a:ext uri="{FF2B5EF4-FFF2-40B4-BE49-F238E27FC236}">
+                <a16:creationId xmlns:a16="http://schemas.microsoft.com/office/drawing/2014/main" id="{DDE5C8C4-C0CA-4FD5-9CCB-310703A08BBD}"/>
+              </a:ext>
+            </a:extLst>
+          </p:cNvPr>
+          <p:cNvSpPr/>
+          <p:nvPr/>
+        </p:nvSpPr>
+        <p:spPr>
+          <a:xfrm>
+            <a:off x="4367267" y="3140968"/>
+            <a:ext cx="423569" cy="396000"/>
+          </a:xfrm>
+          <a:prstGeom prst="rect">
+            <a:avLst/>
+          </a:prstGeom>
+          <a:noFill/>
+          <a:ln w="9525"/>
+        </p:spPr>
+        <p:style>
+          <a:lnRef idx="2">
+            <a:schemeClr val="accent1">
+              <a:shade val="50000"/>
+            </a:schemeClr>
+          </a:lnRef>
+          <a:fillRef idx="1">
+            <a:schemeClr val="accent1"/>
+          </a:fillRef>
+          <a:effectRef idx="0">
+            <a:schemeClr val="accent1"/>
+          </a:effectRef>
+          <a:fontRef idx="minor">
+            <a:schemeClr val="lt1"/>
+          </a:fontRef>
+        </p:style>
+        <p:txBody>
+          <a:bodyPr rot="0" spcFirstLastPara="0" vertOverflow="overflow" horzOverflow="overflow" vert="horz" wrap="square" lIns="68580" tIns="34290" rIns="68580" bIns="34290" numCol="1" spcCol="0" rtlCol="0" fromWordArt="0" anchor="ctr" anchorCtr="0" forceAA="0" compatLnSpc="1">
+            <a:prstTxWarp prst="textNoShape">
+              <a:avLst/>
+            </a:prstTxWarp>
+            <a:noAutofit/>
+          </a:bodyPr>
+          <a:lstStyle/>
+          <a:p>
+            <a:pPr algn="ctr" defTabSz="685800"/>
+            <a:r>
+              <a:rPr lang="fr-FR" sz="1350" dirty="0">
+                <a:ln w="0"/>
+                <a:solidFill>
+                  <a:schemeClr val="tx1"/>
+                </a:solidFill>
+                <a:effectLst>
+                  <a:outerShdw blurRad="38100" dist="19050" dir="2700000" algn="tl" rotWithShape="0">
+                    <a:schemeClr val="dk1">
+                      <a:alpha val="40000"/>
+                    </a:schemeClr>
+                  </a:outerShdw>
+                </a:effectLst>
+                <a:latin typeface="Calibri" panose="020F0502020204030204"/>
+              </a:rPr>
+              <a:t>25</a:t>
+            </a:r>
+          </a:p>
+        </p:txBody>
+      </p:sp>
+      <p:sp>
+        <p:nvSpPr>
+          <p:cNvPr id="12" name="Rectangle 11">
+            <a:extLst>
+              <a:ext uri="{FF2B5EF4-FFF2-40B4-BE49-F238E27FC236}">
+                <a16:creationId xmlns:a16="http://schemas.microsoft.com/office/drawing/2014/main" id="{14921013-DADD-4335-80E0-5BEBC11C2462}"/>
+              </a:ext>
+            </a:extLst>
+          </p:cNvPr>
+          <p:cNvSpPr/>
+          <p:nvPr/>
+        </p:nvSpPr>
+        <p:spPr>
+          <a:xfrm>
+            <a:off x="4792726" y="3140968"/>
+            <a:ext cx="423569" cy="396000"/>
+          </a:xfrm>
+          <a:prstGeom prst="rect">
+            <a:avLst/>
+          </a:prstGeom>
+          <a:noFill/>
+          <a:ln w="9525"/>
+        </p:spPr>
+        <p:style>
+          <a:lnRef idx="2">
+            <a:schemeClr val="accent1">
+              <a:shade val="50000"/>
+            </a:schemeClr>
+          </a:lnRef>
+          <a:fillRef idx="1">
+            <a:schemeClr val="accent1"/>
+          </a:fillRef>
+          <a:effectRef idx="0">
+            <a:schemeClr val="accent1"/>
+          </a:effectRef>
+          <a:fontRef idx="minor">
+            <a:schemeClr val="lt1"/>
+          </a:fontRef>
+        </p:style>
+        <p:txBody>
+          <a:bodyPr rot="0" spcFirstLastPara="0" vertOverflow="overflow" horzOverflow="overflow" vert="horz" wrap="square" lIns="68580" tIns="34290" rIns="68580" bIns="34290" numCol="1" spcCol="0" rtlCol="0" fromWordArt="0" anchor="ctr" anchorCtr="0" forceAA="0" compatLnSpc="1">
+            <a:prstTxWarp prst="textNoShape">
+              <a:avLst/>
+            </a:prstTxWarp>
+            <a:noAutofit/>
+          </a:bodyPr>
+          <a:lstStyle/>
+          <a:p>
+            <a:pPr algn="ctr" defTabSz="685800"/>
+            <a:r>
+              <a:rPr lang="fr-FR" sz="1350" dirty="0">
+                <a:ln w="0"/>
+                <a:solidFill>
+                  <a:schemeClr val="tx1"/>
+                </a:solidFill>
+                <a:effectLst>
+                  <a:outerShdw blurRad="38100" dist="19050" dir="2700000" algn="tl" rotWithShape="0">
+                    <a:schemeClr val="dk1">
+                      <a:alpha val="40000"/>
+                    </a:schemeClr>
+                  </a:outerShdw>
+                </a:effectLst>
+                <a:latin typeface="Calibri" panose="020F0502020204030204"/>
+              </a:rPr>
+              <a:t>26</a:t>
+            </a:r>
+          </a:p>
+        </p:txBody>
+      </p:sp>
+      <p:sp>
+        <p:nvSpPr>
+          <p:cNvPr id="13" name="Rectangle 12">
+            <a:extLst>
+              <a:ext uri="{FF2B5EF4-FFF2-40B4-BE49-F238E27FC236}">
+                <a16:creationId xmlns:a16="http://schemas.microsoft.com/office/drawing/2014/main" id="{16F6895B-92A2-4981-91E9-C6C8341D6B91}"/>
+              </a:ext>
+            </a:extLst>
+          </p:cNvPr>
+          <p:cNvSpPr/>
+          <p:nvPr/>
+        </p:nvSpPr>
+        <p:spPr>
+          <a:xfrm>
+            <a:off x="5218185" y="3140968"/>
+            <a:ext cx="423569" cy="396000"/>
+          </a:xfrm>
+          <a:prstGeom prst="rect">
+            <a:avLst/>
+          </a:prstGeom>
+          <a:noFill/>
+          <a:ln w="9525"/>
+        </p:spPr>
+        <p:style>
+          <a:lnRef idx="2">
+            <a:schemeClr val="accent1">
+              <a:shade val="50000"/>
+            </a:schemeClr>
+          </a:lnRef>
+          <a:fillRef idx="1">
+            <a:schemeClr val="accent1"/>
+          </a:fillRef>
+          <a:effectRef idx="0">
+            <a:schemeClr val="accent1"/>
+          </a:effectRef>
+          <a:fontRef idx="minor">
+            <a:schemeClr val="lt1"/>
+          </a:fontRef>
+        </p:style>
+        <p:txBody>
+          <a:bodyPr rot="0" spcFirstLastPara="0" vertOverflow="overflow" horzOverflow="overflow" vert="horz" wrap="square" lIns="68580" tIns="34290" rIns="68580" bIns="34290" numCol="1" spcCol="0" rtlCol="0" fromWordArt="0" anchor="ctr" anchorCtr="0" forceAA="0" compatLnSpc="1">
+            <a:prstTxWarp prst="textNoShape">
+              <a:avLst/>
+            </a:prstTxWarp>
+            <a:noAutofit/>
+          </a:bodyPr>
+          <a:lstStyle/>
+          <a:p>
+            <a:pPr algn="ctr" defTabSz="685800"/>
+            <a:r>
+              <a:rPr lang="fr-FR" sz="1350" dirty="0">
+                <a:ln w="0"/>
+                <a:solidFill>
+                  <a:schemeClr val="tx1"/>
+                </a:solidFill>
+                <a:effectLst>
+                  <a:outerShdw blurRad="38100" dist="19050" dir="2700000" algn="tl" rotWithShape="0">
+                    <a:schemeClr val="dk1">
+                      <a:alpha val="40000"/>
+                    </a:schemeClr>
+                  </a:outerShdw>
+                </a:effectLst>
+                <a:latin typeface="Calibri" panose="020F0502020204030204"/>
+              </a:rPr>
+              <a:t>27</a:t>
+            </a:r>
+          </a:p>
+        </p:txBody>
+      </p:sp>
+      <p:sp>
+        <p:nvSpPr>
+          <p:cNvPr id="14" name="Rectangle 13">
+            <a:extLst>
+              <a:ext uri="{FF2B5EF4-FFF2-40B4-BE49-F238E27FC236}">
+                <a16:creationId xmlns:a16="http://schemas.microsoft.com/office/drawing/2014/main" id="{61342BAE-F3CF-4C02-8E6D-9A3981E56E44}"/>
+              </a:ext>
+            </a:extLst>
+          </p:cNvPr>
+          <p:cNvSpPr/>
+          <p:nvPr/>
+        </p:nvSpPr>
+        <p:spPr>
+          <a:xfrm>
+            <a:off x="5643644" y="3140968"/>
+            <a:ext cx="423569" cy="396000"/>
+          </a:xfrm>
+          <a:prstGeom prst="rect">
+            <a:avLst/>
+          </a:prstGeom>
+          <a:noFill/>
+          <a:ln w="9525"/>
+        </p:spPr>
+        <p:style>
+          <a:lnRef idx="2">
+            <a:schemeClr val="accent1">
+              <a:shade val="50000"/>
+            </a:schemeClr>
+          </a:lnRef>
+          <a:fillRef idx="1">
+            <a:schemeClr val="accent1"/>
+          </a:fillRef>
+          <a:effectRef idx="0">
+            <a:schemeClr val="accent1"/>
+          </a:effectRef>
+          <a:fontRef idx="minor">
+            <a:schemeClr val="lt1"/>
+          </a:fontRef>
+        </p:style>
+        <p:txBody>
+          <a:bodyPr rot="0" spcFirstLastPara="0" vertOverflow="overflow" horzOverflow="overflow" vert="horz" wrap="square" lIns="68580" tIns="34290" rIns="68580" bIns="34290" numCol="1" spcCol="0" rtlCol="0" fromWordArt="0" anchor="ctr" anchorCtr="0" forceAA="0" compatLnSpc="1">
+            <a:prstTxWarp prst="textNoShape">
+              <a:avLst/>
+            </a:prstTxWarp>
+            <a:noAutofit/>
+          </a:bodyPr>
+          <a:lstStyle/>
+          <a:p>
+            <a:pPr algn="ctr" defTabSz="685800"/>
+            <a:r>
+              <a:rPr lang="fr-FR" sz="1350" dirty="0">
+                <a:ln w="0"/>
+                <a:solidFill>
+                  <a:schemeClr val="tx1"/>
+                </a:solidFill>
+                <a:effectLst>
+                  <a:outerShdw blurRad="38100" dist="19050" dir="2700000" algn="tl" rotWithShape="0">
+                    <a:schemeClr val="dk1">
+                      <a:alpha val="40000"/>
+                    </a:schemeClr>
+                  </a:outerShdw>
+                </a:effectLst>
+                <a:latin typeface="Calibri" panose="020F0502020204030204"/>
+              </a:rPr>
+              <a:t>28</a:t>
+            </a:r>
+          </a:p>
+        </p:txBody>
+      </p:sp>
+      <p:sp>
+        <p:nvSpPr>
+          <p:cNvPr id="15" name="Rectangle 14">
+            <a:extLst>
+              <a:ext uri="{FF2B5EF4-FFF2-40B4-BE49-F238E27FC236}">
+                <a16:creationId xmlns:a16="http://schemas.microsoft.com/office/drawing/2014/main" id="{DE09D0A8-7AF8-4AAE-9D39-57739BD45F3F}"/>
+              </a:ext>
+            </a:extLst>
+          </p:cNvPr>
+          <p:cNvSpPr/>
+          <p:nvPr/>
+        </p:nvSpPr>
+        <p:spPr>
+          <a:xfrm>
+            <a:off x="6069103" y="3140968"/>
+            <a:ext cx="423569" cy="396000"/>
+          </a:xfrm>
+          <a:prstGeom prst="rect">
+            <a:avLst/>
+          </a:prstGeom>
+          <a:noFill/>
+          <a:ln w="9525"/>
+        </p:spPr>
+        <p:style>
+          <a:lnRef idx="2">
+            <a:schemeClr val="accent1">
+              <a:shade val="50000"/>
+            </a:schemeClr>
+          </a:lnRef>
+          <a:fillRef idx="1">
+            <a:schemeClr val="accent1"/>
+          </a:fillRef>
+          <a:effectRef idx="0">
+            <a:schemeClr val="accent1"/>
+          </a:effectRef>
+          <a:fontRef idx="minor">
+            <a:schemeClr val="lt1"/>
+          </a:fontRef>
+        </p:style>
+        <p:txBody>
+          <a:bodyPr rot="0" spcFirstLastPara="0" vertOverflow="overflow" horzOverflow="overflow" vert="horz" wrap="square" lIns="68580" tIns="34290" rIns="68580" bIns="34290" numCol="1" spcCol="0" rtlCol="0" fromWordArt="0" anchor="ctr" anchorCtr="0" forceAA="0" compatLnSpc="1">
+            <a:prstTxWarp prst="textNoShape">
+              <a:avLst/>
+            </a:prstTxWarp>
+            <a:noAutofit/>
+          </a:bodyPr>
+          <a:lstStyle/>
+          <a:p>
+            <a:pPr algn="ctr" defTabSz="685800"/>
+            <a:r>
+              <a:rPr lang="fr-FR" sz="1350" dirty="0">
+                <a:ln w="0"/>
+                <a:solidFill>
+                  <a:schemeClr val="tx1"/>
+                </a:solidFill>
+                <a:effectLst>
+                  <a:outerShdw blurRad="38100" dist="19050" dir="2700000" algn="tl" rotWithShape="0">
+                    <a:schemeClr val="dk1">
+                      <a:alpha val="40000"/>
+                    </a:schemeClr>
+                  </a:outerShdw>
+                </a:effectLst>
+                <a:latin typeface="Calibri" panose="020F0502020204030204"/>
+              </a:rPr>
+              <a:t>29</a:t>
+            </a:r>
+          </a:p>
+        </p:txBody>
+      </p:sp>
+      <p:sp>
+        <p:nvSpPr>
+          <p:cNvPr id="16" name="Rectangle 15">
+            <a:extLst>
+              <a:ext uri="{FF2B5EF4-FFF2-40B4-BE49-F238E27FC236}">
+                <a16:creationId xmlns:a16="http://schemas.microsoft.com/office/drawing/2014/main" id="{170A2E4D-AC5C-4E21-90B1-884EBD2FD0BA}"/>
+              </a:ext>
+            </a:extLst>
+          </p:cNvPr>
+          <p:cNvSpPr/>
+          <p:nvPr/>
+        </p:nvSpPr>
+        <p:spPr>
+          <a:xfrm>
+            <a:off x="6494567" y="3140968"/>
+            <a:ext cx="423569" cy="396000"/>
+          </a:xfrm>
+          <a:prstGeom prst="rect">
+            <a:avLst/>
+          </a:prstGeom>
+          <a:noFill/>
+          <a:ln w="9525"/>
+        </p:spPr>
+        <p:style>
+          <a:lnRef idx="2">
+            <a:schemeClr val="accent1">
+              <a:shade val="50000"/>
+            </a:schemeClr>
+          </a:lnRef>
+          <a:fillRef idx="1">
+            <a:schemeClr val="accent1"/>
+          </a:fillRef>
+          <a:effectRef idx="0">
+            <a:schemeClr val="accent1"/>
+          </a:effectRef>
+          <a:fontRef idx="minor">
+            <a:schemeClr val="lt1"/>
+          </a:fontRef>
+        </p:style>
+        <p:txBody>
+          <a:bodyPr rot="0" spcFirstLastPara="0" vertOverflow="overflow" horzOverflow="overflow" vert="horz" wrap="square" lIns="68580" tIns="34290" rIns="68580" bIns="34290" numCol="1" spcCol="0" rtlCol="0" fromWordArt="0" anchor="ctr" anchorCtr="0" forceAA="0" compatLnSpc="1">
+            <a:prstTxWarp prst="textNoShape">
+              <a:avLst/>
+            </a:prstTxWarp>
+            <a:noAutofit/>
+          </a:bodyPr>
+          <a:lstStyle/>
+          <a:p>
+            <a:pPr algn="ctr" defTabSz="685800"/>
+            <a:r>
+              <a:rPr lang="fr-FR" sz="1350" dirty="0">
+                <a:ln w="0"/>
+                <a:solidFill>
+                  <a:schemeClr val="tx1"/>
+                </a:solidFill>
+                <a:effectLst>
+                  <a:outerShdw blurRad="38100" dist="19050" dir="2700000" algn="tl" rotWithShape="0">
+                    <a:schemeClr val="dk1">
+                      <a:alpha val="40000"/>
+                    </a:schemeClr>
+                  </a:outerShdw>
+                </a:effectLst>
+                <a:latin typeface="Calibri" panose="020F0502020204030204"/>
+              </a:rPr>
+              <a:t>30</a:t>
+            </a:r>
+          </a:p>
+        </p:txBody>
+      </p:sp>
+      <p:sp>
+        <p:nvSpPr>
+          <p:cNvPr id="43" name="Rectangle 42">
+            <a:extLst>
+              <a:ext uri="{FF2B5EF4-FFF2-40B4-BE49-F238E27FC236}">
+                <a16:creationId xmlns:a16="http://schemas.microsoft.com/office/drawing/2014/main" id="{413A49C4-2EB0-4B9D-BA5C-D62F310EEB8B}"/>
+              </a:ext>
+            </a:extLst>
+          </p:cNvPr>
+          <p:cNvSpPr/>
+          <p:nvPr/>
+        </p:nvSpPr>
+        <p:spPr>
+          <a:xfrm>
+            <a:off x="7028751" y="3153829"/>
+            <a:ext cx="423569" cy="396000"/>
+          </a:xfrm>
+          <a:prstGeom prst="rect">
+            <a:avLst/>
+          </a:prstGeom>
+          <a:noFill/>
+          <a:ln w="28575"/>
+        </p:spPr>
+        <p:style>
+          <a:lnRef idx="2">
+            <a:schemeClr val="accent1">
+              <a:shade val="50000"/>
+            </a:schemeClr>
+          </a:lnRef>
+          <a:fillRef idx="1">
+            <a:schemeClr val="accent1"/>
+          </a:fillRef>
+          <a:effectRef idx="0">
+            <a:schemeClr val="accent1"/>
+          </a:effectRef>
+          <a:fontRef idx="minor">
+            <a:schemeClr val="lt1"/>
+          </a:fontRef>
+        </p:style>
+        <p:txBody>
+          <a:bodyPr rot="0" spcFirstLastPara="0" vertOverflow="overflow" horzOverflow="overflow" vert="horz" wrap="square" lIns="68580" tIns="34290" rIns="68580" bIns="34290" numCol="1" spcCol="0" rtlCol="0" fromWordArt="0" anchor="ctr" anchorCtr="0" forceAA="0" compatLnSpc="1">
+            <a:prstTxWarp prst="textNoShape">
+              <a:avLst/>
+            </a:prstTxWarp>
+            <a:noAutofit/>
+          </a:bodyPr>
+          <a:lstStyle/>
+          <a:p>
+            <a:pPr algn="ctr" defTabSz="685800"/>
+            <a:r>
+              <a:rPr lang="fr-FR" sz="1200" dirty="0">
+                <a:ln w="0"/>
+                <a:solidFill>
+                  <a:schemeClr val="tx1"/>
+                </a:solidFill>
+                <a:effectLst>
+                  <a:outerShdw blurRad="38100" dist="19050" dir="2700000" algn="tl" rotWithShape="0">
+                    <a:schemeClr val="dk1">
+                      <a:alpha val="40000"/>
+                    </a:schemeClr>
+                  </a:outerShdw>
+                </a:effectLst>
+                <a:latin typeface="Calibri" panose="020F0502020204030204"/>
+              </a:rPr>
+              <a:t>land</a:t>
+            </a:r>
+          </a:p>
+        </p:txBody>
+      </p:sp>
+      <p:pic>
+        <p:nvPicPr>
+          <p:cNvPr id="44" name="Image 43">
+            <a:extLst>
+              <a:ext uri="{FF2B5EF4-FFF2-40B4-BE49-F238E27FC236}">
+                <a16:creationId xmlns:a16="http://schemas.microsoft.com/office/drawing/2014/main" id="{6AF52CA8-5FDC-4E5B-8187-611351F692C5}"/>
+              </a:ext>
+            </a:extLst>
+          </p:cNvPr>
+          <p:cNvPicPr>
+            <a:picLocks noChangeAspect="1"/>
+          </p:cNvPicPr>
+          <p:nvPr/>
+        </p:nvPicPr>
+        <p:blipFill>
+          <a:blip r:embed="rId2"/>
+          <a:stretch>
+            <a:fillRect/>
+          </a:stretch>
+        </p:blipFill>
+        <p:spPr>
+          <a:xfrm>
+            <a:off x="611560" y="4365104"/>
+            <a:ext cx="7584081" cy="847417"/>
+          </a:xfrm>
+          <a:prstGeom prst="rect">
+            <a:avLst/>
+          </a:prstGeom>
+        </p:spPr>
+      </p:pic>
+    </p:spTree>
+    <p:extLst>
+      <p:ext uri="{BB962C8B-B14F-4D97-AF65-F5344CB8AC3E}">
+        <p14:creationId xmlns:p14="http://schemas.microsoft.com/office/powerpoint/2010/main" val="99111470"/>
+      </p:ext>
+    </p:extLst>
+  </p:cSld>
+  <p:clrMapOvr>
+    <a:masterClrMapping/>
+  </p:clrMapOvr>
+</p:sld>
+</file>
+
+<file path=ppt/slides/slide5.xml><?xml version="1.0" encoding="utf-8"?>
 <p:sld xmlns:a="http://schemas.openxmlformats.org/drawingml/2006/main" xmlns:r="http://schemas.openxmlformats.org/officeDocument/2006/relationships" xmlns:p="http://schemas.openxmlformats.org/presentationml/2006/main">
   <p:cSld>
     <p:spTree>
@@ -5575,6 +8984,270 @@
           </a:p>
         </p:txBody>
       </p:sp>
+      <p:sp>
+        <p:nvSpPr>
+          <p:cNvPr id="35" name="Rectangle 34"/>
+          <p:cNvSpPr/>
+          <p:nvPr/>
+        </p:nvSpPr>
+        <p:spPr>
+          <a:xfrm>
+            <a:off x="6948263" y="5949281"/>
+            <a:ext cx="1593651" cy="360040"/>
+          </a:xfrm>
+          <a:prstGeom prst="rect">
+            <a:avLst/>
+          </a:prstGeom>
+          <a:solidFill>
+            <a:srgbClr val="CCCCCC"/>
+          </a:solidFill>
+          <a:ln>
+            <a:noFill/>
+          </a:ln>
+        </p:spPr>
+        <p:style>
+          <a:lnRef idx="2">
+            <a:schemeClr val="accent1">
+              <a:shade val="50000"/>
+            </a:schemeClr>
+          </a:lnRef>
+          <a:fillRef idx="1">
+            <a:schemeClr val="accent1"/>
+          </a:fillRef>
+          <a:effectRef idx="0">
+            <a:schemeClr val="accent1"/>
+          </a:effectRef>
+          <a:fontRef idx="minor">
+            <a:schemeClr val="lt1"/>
+          </a:fontRef>
+        </p:style>
+        <p:txBody>
+          <a:bodyPr rtlCol="0" anchor="ctr"/>
+          <a:lstStyle/>
+          <a:p>
+            <a:pPr algn="ctr"/>
+            <a:endParaRPr lang="fr-FR"/>
+          </a:p>
+        </p:txBody>
+      </p:sp>
+      <p:pic>
+        <p:nvPicPr>
+          <p:cNvPr id="7" name="Image 6">
+            <a:extLst>
+              <a:ext uri="{FF2B5EF4-FFF2-40B4-BE49-F238E27FC236}">
+                <a16:creationId xmlns:a16="http://schemas.microsoft.com/office/drawing/2014/main" id="{89300997-9F17-4992-BB0D-FDAFD1F1C6F3}"/>
+              </a:ext>
+            </a:extLst>
+          </p:cNvPr>
+          <p:cNvPicPr>
+            <a:picLocks noChangeAspect="1"/>
+          </p:cNvPicPr>
+          <p:nvPr/>
+        </p:nvPicPr>
+        <p:blipFill>
+          <a:blip r:embed="rId4"/>
+          <a:stretch>
+            <a:fillRect/>
+          </a:stretch>
+        </p:blipFill>
+        <p:spPr>
+          <a:xfrm>
+            <a:off x="2388519" y="89436"/>
+            <a:ext cx="5999905" cy="670407"/>
+          </a:xfrm>
+          <a:prstGeom prst="rect">
+            <a:avLst/>
+          </a:prstGeom>
+        </p:spPr>
+      </p:pic>
+    </p:spTree>
+    <p:extLst>
+      <p:ext uri="{BB962C8B-B14F-4D97-AF65-F5344CB8AC3E}">
+        <p14:creationId xmlns:p14="http://schemas.microsoft.com/office/powerpoint/2010/main" val="3050280596"/>
+      </p:ext>
+    </p:extLst>
+  </p:cSld>
+  <p:clrMapOvr>
+    <a:masterClrMapping/>
+  </p:clrMapOvr>
+</p:sld>
+</file>
+
+<file path=ppt/slides/slide6.xml><?xml version="1.0" encoding="utf-8"?>
+<p:sld xmlns:a="http://schemas.openxmlformats.org/drawingml/2006/main" xmlns:r="http://schemas.openxmlformats.org/officeDocument/2006/relationships" xmlns:p="http://schemas.openxmlformats.org/presentationml/2006/main">
+  <p:cSld>
+    <p:spTree>
+      <p:nvGrpSpPr>
+        <p:cNvPr id="1" name=""/>
+        <p:cNvGrpSpPr/>
+        <p:nvPr/>
+      </p:nvGrpSpPr>
+      <p:grpSpPr>
+        <a:xfrm>
+          <a:off x="0" y="0"/>
+          <a:ext cx="0" cy="0"/>
+          <a:chOff x="0" y="0"/>
+          <a:chExt cx="0" cy="0"/>
+        </a:xfrm>
+      </p:grpSpPr>
+      <p:pic>
+        <p:nvPicPr>
+          <p:cNvPr id="2" name="Image 1"/>
+          <p:cNvPicPr>
+            <a:picLocks noChangeAspect="1"/>
+          </p:cNvPicPr>
+          <p:nvPr/>
+        </p:nvPicPr>
+        <p:blipFill>
+          <a:blip r:embed="rId2">
+            <a:clrChange>
+              <a:clrFrom>
+                <a:srgbClr val="000000">
+                  <a:alpha val="0"/>
+                </a:srgbClr>
+              </a:clrFrom>
+              <a:clrTo>
+                <a:srgbClr val="000000">
+                  <a:alpha val="0"/>
+                </a:srgbClr>
+              </a:clrTo>
+            </a:clrChange>
+            <a:extLst>
+              <a:ext uri="{28A0092B-C50C-407E-A947-70E740481C1C}">
+                <a14:useLocalDpi xmlns:a14="http://schemas.microsoft.com/office/drawing/2010/main" val="0"/>
+              </a:ext>
+            </a:extLst>
+          </a:blip>
+          <a:stretch>
+            <a:fillRect/>
+          </a:stretch>
+        </p:blipFill>
+        <p:spPr>
+          <a:xfrm>
+            <a:off x="0" y="120316"/>
+            <a:ext cx="9144000" cy="6617368"/>
+          </a:xfrm>
+          <a:prstGeom prst="rect">
+            <a:avLst/>
+          </a:prstGeom>
+        </p:spPr>
+      </p:pic>
+      <p:sp>
+        <p:nvSpPr>
+          <p:cNvPr id="4" name="Rectangle 3"/>
+          <p:cNvSpPr/>
+          <p:nvPr/>
+        </p:nvSpPr>
+        <p:spPr>
+          <a:xfrm>
+            <a:off x="202958" y="126177"/>
+            <a:ext cx="716206" cy="773936"/>
+          </a:xfrm>
+          <a:prstGeom prst="rect">
+            <a:avLst/>
+          </a:prstGeom>
+          <a:solidFill>
+            <a:srgbClr val="CCCCCC"/>
+          </a:solidFill>
+          <a:ln>
+            <a:noFill/>
+          </a:ln>
+        </p:spPr>
+        <p:style>
+          <a:lnRef idx="2">
+            <a:schemeClr val="accent1">
+              <a:shade val="50000"/>
+            </a:schemeClr>
+          </a:lnRef>
+          <a:fillRef idx="1">
+            <a:schemeClr val="accent1"/>
+          </a:fillRef>
+          <a:effectRef idx="0">
+            <a:schemeClr val="accent1"/>
+          </a:effectRef>
+          <a:fontRef idx="minor">
+            <a:schemeClr val="lt1"/>
+          </a:fontRef>
+        </p:style>
+        <p:txBody>
+          <a:bodyPr rtlCol="0" anchor="ctr"/>
+          <a:lstStyle/>
+          <a:p>
+            <a:pPr algn="ctr"/>
+            <a:endParaRPr lang="fr-FR"/>
+          </a:p>
+        </p:txBody>
+      </p:sp>
+      <p:pic>
+        <p:nvPicPr>
+          <p:cNvPr id="3" name="Image 2"/>
+          <p:cNvPicPr>
+            <a:picLocks noChangeAspect="1"/>
+          </p:cNvPicPr>
+          <p:nvPr/>
+        </p:nvPicPr>
+        <p:blipFill>
+          <a:blip r:embed="rId3"/>
+          <a:stretch>
+            <a:fillRect/>
+          </a:stretch>
+        </p:blipFill>
+        <p:spPr>
+          <a:xfrm>
+            <a:off x="166956" y="110791"/>
+            <a:ext cx="788210" cy="860412"/>
+          </a:xfrm>
+          <a:prstGeom prst="rect">
+            <a:avLst/>
+          </a:prstGeom>
+        </p:spPr>
+      </p:pic>
+      <p:sp>
+        <p:nvSpPr>
+          <p:cNvPr id="6" name="Rectangle 5"/>
+          <p:cNvSpPr/>
+          <p:nvPr/>
+        </p:nvSpPr>
+        <p:spPr>
+          <a:xfrm>
+            <a:off x="5510485" y="138113"/>
+            <a:ext cx="716206" cy="722981"/>
+          </a:xfrm>
+          <a:prstGeom prst="rect">
+            <a:avLst/>
+          </a:prstGeom>
+          <a:solidFill>
+            <a:srgbClr val="CCCCCC"/>
+          </a:solidFill>
+          <a:ln>
+            <a:noFill/>
+          </a:ln>
+        </p:spPr>
+        <p:style>
+          <a:lnRef idx="2">
+            <a:schemeClr val="accent1">
+              <a:shade val="50000"/>
+            </a:schemeClr>
+          </a:lnRef>
+          <a:fillRef idx="1">
+            <a:schemeClr val="accent1"/>
+          </a:fillRef>
+          <a:effectRef idx="0">
+            <a:schemeClr val="accent1"/>
+          </a:effectRef>
+          <a:fontRef idx="minor">
+            <a:schemeClr val="lt1"/>
+          </a:fontRef>
+        </p:style>
+        <p:txBody>
+          <a:bodyPr rtlCol="0" anchor="ctr"/>
+          <a:lstStyle/>
+          <a:p>
+            <a:pPr algn="ctr"/>
+            <a:endParaRPr lang="fr-FR"/>
+          </a:p>
+        </p:txBody>
+      </p:sp>
       <p:pic>
         <p:nvPicPr>
           <p:cNvPr id="34" name="Image 33"/>
@@ -5658,7 +9331,7 @@
 </p:sld>
 </file>
 
-<file path=ppt/slides/slide5.xml><?xml version="1.0" encoding="utf-8"?>
+<file path=ppt/slides/slide7.xml><?xml version="1.0" encoding="utf-8"?>
 <p:sld xmlns:a="http://schemas.openxmlformats.org/drawingml/2006/main" xmlns:r="http://schemas.openxmlformats.org/officeDocument/2006/relationships" xmlns:p="http://schemas.openxmlformats.org/presentationml/2006/main">
   <p:cSld>
     <p:spTree>
